--- a/docs/CI_CD/CI-CD-Plan.pptx
+++ b/docs/CI_CD/CI-CD-Plan.pptx
@@ -4,6 +4,9 @@
   <p:sldMasterIdLst>
     <p:sldMasterId id="2147483648" r:id="rId1"/>
   </p:sldMasterIdLst>
+  <p:notesMasterIdLst>
+    <p:notesMasterId r:id="rId17"/>
+  </p:notesMasterIdLst>
   <p:sldIdLst>
     <p:sldId id="256" r:id="rId2"/>
     <p:sldId id="257" r:id="rId3"/>
@@ -21,37 +24,121 @@
     <p:sldId id="269" r:id="rId15"/>
     <p:sldId id="270" r:id="rId16"/>
   </p:sldIdLst>
-  <p:notesMasterIdLst>
-    <p:notesMasterId r:id="rId17"/>
-  </p:notesMasterIdLst>
   <p:sldSz cx="14630400" cy="8229600"/>
   <p:notesSz cx="8229600" cy="14630400"/>
   <p:embeddedFontLst>
     <p:embeddedFont>
-      <p:font typeface="Alice"/>
-      <p:regular r:id="rId22"/>
+      <p:font typeface="Alice" pitchFamily="2" charset="0"/>
+      <p:regular r:id="rId18"/>
     </p:embeddedFont>
     <p:embeddedFont>
-      <p:font typeface="Alice"/>
-      <p:regular r:id="rId23"/>
-    </p:embeddedFont>
-    <p:embeddedFont>
-      <p:font typeface="Lora"/>
-      <p:regular r:id="rId24"/>
-    </p:embeddedFont>
-    <p:embeddedFont>
-      <p:font typeface="Lora"/>
-      <p:regular r:id="rId25"/>
-    </p:embeddedFont>
-    <p:embeddedFont>
-      <p:font typeface="Lora"/>
-      <p:regular r:id="rId26"/>
-    </p:embeddedFont>
-    <p:embeddedFont>
-      <p:font typeface="Lora"/>
-      <p:regular r:id="rId27"/>
+      <p:font typeface="Lora" pitchFamily="2" charset="0"/>
+      <p:regular r:id="rId19"/>
+      <p:bold r:id="rId20"/>
+      <p:italic r:id="rId21"/>
+      <p:boldItalic r:id="rId22"/>
     </p:embeddedFont>
   </p:embeddedFontLst>
+  <p:defaultTextStyle>
+    <a:defPPr>
+      <a:defRPr lang="zh-TW"/>
+    </a:defPPr>
+    <a:lvl1pPr marL="0" algn="l" defTabSz="914400" rtl="0" eaLnBrk="1" latinLnBrk="0" hangingPunct="1">
+      <a:defRPr sz="1800" kern="1200">
+        <a:solidFill>
+          <a:schemeClr val="tx1"/>
+        </a:solidFill>
+        <a:latin typeface="+mn-lt"/>
+        <a:ea typeface="+mn-ea"/>
+        <a:cs typeface="+mn-cs"/>
+      </a:defRPr>
+    </a:lvl1pPr>
+    <a:lvl2pPr marL="457200" algn="l" defTabSz="914400" rtl="0" eaLnBrk="1" latinLnBrk="0" hangingPunct="1">
+      <a:defRPr sz="1800" kern="1200">
+        <a:solidFill>
+          <a:schemeClr val="tx1"/>
+        </a:solidFill>
+        <a:latin typeface="+mn-lt"/>
+        <a:ea typeface="+mn-ea"/>
+        <a:cs typeface="+mn-cs"/>
+      </a:defRPr>
+    </a:lvl2pPr>
+    <a:lvl3pPr marL="914400" algn="l" defTabSz="914400" rtl="0" eaLnBrk="1" latinLnBrk="0" hangingPunct="1">
+      <a:defRPr sz="1800" kern="1200">
+        <a:solidFill>
+          <a:schemeClr val="tx1"/>
+        </a:solidFill>
+        <a:latin typeface="+mn-lt"/>
+        <a:ea typeface="+mn-ea"/>
+        <a:cs typeface="+mn-cs"/>
+      </a:defRPr>
+    </a:lvl3pPr>
+    <a:lvl4pPr marL="1371600" algn="l" defTabSz="914400" rtl="0" eaLnBrk="1" latinLnBrk="0" hangingPunct="1">
+      <a:defRPr sz="1800" kern="1200">
+        <a:solidFill>
+          <a:schemeClr val="tx1"/>
+        </a:solidFill>
+        <a:latin typeface="+mn-lt"/>
+        <a:ea typeface="+mn-ea"/>
+        <a:cs typeface="+mn-cs"/>
+      </a:defRPr>
+    </a:lvl4pPr>
+    <a:lvl5pPr marL="1828800" algn="l" defTabSz="914400" rtl="0" eaLnBrk="1" latinLnBrk="0" hangingPunct="1">
+      <a:defRPr sz="1800" kern="1200">
+        <a:solidFill>
+          <a:schemeClr val="tx1"/>
+        </a:solidFill>
+        <a:latin typeface="+mn-lt"/>
+        <a:ea typeface="+mn-ea"/>
+        <a:cs typeface="+mn-cs"/>
+      </a:defRPr>
+    </a:lvl5pPr>
+    <a:lvl6pPr marL="2286000" algn="l" defTabSz="914400" rtl="0" eaLnBrk="1" latinLnBrk="0" hangingPunct="1">
+      <a:defRPr sz="1800" kern="1200">
+        <a:solidFill>
+          <a:schemeClr val="tx1"/>
+        </a:solidFill>
+        <a:latin typeface="+mn-lt"/>
+        <a:ea typeface="+mn-ea"/>
+        <a:cs typeface="+mn-cs"/>
+      </a:defRPr>
+    </a:lvl6pPr>
+    <a:lvl7pPr marL="2743200" algn="l" defTabSz="914400" rtl="0" eaLnBrk="1" latinLnBrk="0" hangingPunct="1">
+      <a:defRPr sz="1800" kern="1200">
+        <a:solidFill>
+          <a:schemeClr val="tx1"/>
+        </a:solidFill>
+        <a:latin typeface="+mn-lt"/>
+        <a:ea typeface="+mn-ea"/>
+        <a:cs typeface="+mn-cs"/>
+      </a:defRPr>
+    </a:lvl7pPr>
+    <a:lvl8pPr marL="3200400" algn="l" defTabSz="914400" rtl="0" eaLnBrk="1" latinLnBrk="0" hangingPunct="1">
+      <a:defRPr sz="1800" kern="1200">
+        <a:solidFill>
+          <a:schemeClr val="tx1"/>
+        </a:solidFill>
+        <a:latin typeface="+mn-lt"/>
+        <a:ea typeface="+mn-ea"/>
+        <a:cs typeface="+mn-cs"/>
+      </a:defRPr>
+    </a:lvl8pPr>
+    <a:lvl9pPr marL="3657600" algn="l" defTabSz="914400" rtl="0" eaLnBrk="1" latinLnBrk="0" hangingPunct="1">
+      <a:defRPr sz="1800" kern="1200">
+        <a:solidFill>
+          <a:schemeClr val="tx1"/>
+        </a:solidFill>
+        <a:latin typeface="+mn-lt"/>
+        <a:ea typeface="+mn-ea"/>
+        <a:cs typeface="+mn-cs"/>
+      </a:defRPr>
+    </a:lvl9pPr>
+  </p:defaultTextStyle>
+  <p:extLst>
+    <p:ext uri="{EFAFB233-063F-42B5-8137-9DF3F51BA10A}">
+      <p15:sldGuideLst xmlns:p15="http://schemas.microsoft.com/office/powerpoint/2012/main"/>
+    </p:ext>
+  </p:extLst>
 </p:presentation>
 </file>
 
@@ -77,234 +164,10 @@
           <a:chExt cx="0" cy="0"/>
         </a:xfrm>
       </p:grpSpPr>
-      <p:sp>
-        <p:nvSpPr>
-          <p:cNvPr id="2" name="Header Placeholder 1"/>
-          <p:cNvSpPr>
-            <a:spLocks noGrp="1"/>
-          </p:cNvSpPr>
-          <p:nvPr>
-            <p:ph type="hdr" sz="quarter"/>
-          </p:nvPr>
-        </p:nvSpPr>
-        <p:spPr>
-          <a:xfrm>
-            <a:off x="0" y="0"/>
-            <a:ext cx="2971800" cy="458788"/>
-          </a:xfrm>
-          <a:prstGeom prst="rect">
-            <a:avLst/>
-          </a:prstGeom>
-        </p:spPr>
-        <p:txBody>
-          <a:bodyPr vert="horz" lIns="91440" tIns="45720" rIns="91440" bIns="45720" rtlCol="0"/>
-          <a:lstStyle>
-            <a:lvl1pPr algn="l">
-              <a:defRPr sz="1200"/>
-            </a:lvl1pPr>
-          </a:lstStyle>
-          <a:p>
-            <a:endParaRPr lang="en-US"/>
-          </a:p>
-        </p:txBody>
-      </p:sp>
-      <p:sp>
-        <p:nvSpPr>
-          <p:cNvPr id="3" name="Date Placeholder 2"/>
-          <p:cNvSpPr>
-            <a:spLocks noGrp="1"/>
-          </p:cNvSpPr>
-          <p:nvPr>
-            <p:ph type="dt" idx="1"/>
-          </p:nvPr>
-        </p:nvSpPr>
-        <p:spPr>
-          <a:xfrm>
-            <a:off x="3884613" y="0"/>
-            <a:ext cx="2971800" cy="458788"/>
-          </a:xfrm>
-          <a:prstGeom prst="rect">
-            <a:avLst/>
-          </a:prstGeom>
-        </p:spPr>
-        <p:txBody>
-          <a:bodyPr vert="horz" lIns="91440" tIns="45720" rIns="91440" bIns="45720" rtlCol="0"/>
-          <a:lstStyle>
-            <a:lvl1pPr algn="r">
-              <a:defRPr sz="1200"/>
-            </a:lvl1pPr>
-          </a:lstStyle>
-          <a:p>
-            <a:fld id="{5282F153-3F37-0F45-9E97-73ACFA13230C}" type="datetimeFigureOut">
-              <a:rPr lang="en-US"/>
-              <a:t>7/23/19</a:t>
-            </a:fld>
-            <a:endParaRPr lang="en-US"/>
-          </a:p>
-        </p:txBody>
-      </p:sp>
-      <p:sp>
-        <p:nvSpPr>
-          <p:cNvPr id="4" name="Slide Image Placeholder 3"/>
-          <p:cNvSpPr>
-            <a:spLocks noGrp="1" noRot="1" noChangeAspect="1"/>
-          </p:cNvSpPr>
-          <p:nvPr>
-            <p:ph type="sldImg" idx="2"/>
-          </p:nvPr>
-        </p:nvSpPr>
-        <p:spPr>
-          <a:xfrm>
-            <a:off x="685800" y="1143000"/>
-            <a:ext cx="5486400" cy="3086100"/>
-          </a:xfrm>
-          <a:prstGeom prst="rect">
-            <a:avLst/>
-          </a:prstGeom>
-          <a:noFill/>
-          <a:ln w="12700">
-            <a:solidFill>
-              <a:prstClr val="black"/>
-            </a:solidFill>
-          </a:ln>
-        </p:spPr>
-        <p:txBody>
-          <a:bodyPr vert="horz" lIns="91440" tIns="45720" rIns="91440" bIns="45720" rtlCol="0" anchor="ctr"/>
-          <a:lstStyle/>
-          <a:p>
-            <a:endParaRPr lang="en-US"/>
-          </a:p>
-        </p:txBody>
-      </p:sp>
-      <p:sp>
-        <p:nvSpPr>
-          <p:cNvPr id="5" name="Notes Placeholder 4"/>
-          <p:cNvSpPr>
-            <a:spLocks noGrp="1"/>
-          </p:cNvSpPr>
-          <p:nvPr>
-            <p:ph type="body" sz="quarter" idx="3"/>
-          </p:nvPr>
-        </p:nvSpPr>
-        <p:spPr>
-          <a:xfrm>
-            <a:off x="685800" y="4400550"/>
-            <a:ext cx="5486400" cy="3600450"/>
-          </a:xfrm>
-          <a:prstGeom prst="rect">
-            <a:avLst/>
-          </a:prstGeom>
-        </p:spPr>
-        <p:txBody>
-          <a:bodyPr vert="horz" lIns="91440" tIns="45720" rIns="91440" bIns="45720" rtlCol="0"/>
-          <a:lstStyle/>
-          <a:p>
-            <a:pPr lvl="0"/>
-            <a:r>
-              <a:rPr lang="en-US"/>
-              <a:t>Click to edit Master text styles</a:t>
-            </a:r>
-          </a:p>
-          <a:p>
-            <a:pPr lvl="1"/>
-            <a:r>
-              <a:rPr lang="en-US"/>
-              <a:t>Second level</a:t>
-            </a:r>
-          </a:p>
-          <a:p>
-            <a:pPr lvl="2"/>
-            <a:r>
-              <a:rPr lang="en-US"/>
-              <a:t>Third level</a:t>
-            </a:r>
-          </a:p>
-          <a:p>
-            <a:pPr lvl="3"/>
-            <a:r>
-              <a:rPr lang="en-US"/>
-              <a:t>Fourth level</a:t>
-            </a:r>
-          </a:p>
-          <a:p>
-            <a:pPr lvl="4"/>
-            <a:r>
-              <a:rPr lang="en-US"/>
-              <a:t>Fifth level</a:t>
-            </a:r>
-          </a:p>
-        </p:txBody>
-      </p:sp>
-      <p:sp>
-        <p:nvSpPr>
-          <p:cNvPr id="6" name="Footer Placeholder 5"/>
-          <p:cNvSpPr>
-            <a:spLocks noGrp="1"/>
-          </p:cNvSpPr>
-          <p:nvPr>
-            <p:ph type="ftr" sz="quarter" idx="4"/>
-          </p:nvPr>
-        </p:nvSpPr>
-        <p:spPr>
-          <a:xfrm>
-            <a:off x="0" y="8685213"/>
-            <a:ext cx="2971800" cy="458787"/>
-          </a:xfrm>
-          <a:prstGeom prst="rect">
-            <a:avLst/>
-          </a:prstGeom>
-        </p:spPr>
-        <p:txBody>
-          <a:bodyPr vert="horz" lIns="91440" tIns="45720" rIns="91440" bIns="45720" rtlCol="0" anchor="b"/>
-          <a:lstStyle>
-            <a:lvl1pPr algn="l">
-              <a:defRPr sz="1200"/>
-            </a:lvl1pPr>
-          </a:lstStyle>
-          <a:p>
-            <a:endParaRPr lang="en-US"/>
-          </a:p>
-        </p:txBody>
-      </p:sp>
-      <p:sp>
-        <p:nvSpPr>
-          <p:cNvPr id="7" name="Slide Number Placeholder 6"/>
-          <p:cNvSpPr>
-            <a:spLocks noGrp="1"/>
-          </p:cNvSpPr>
-          <p:nvPr>
-            <p:ph type="sldNum" sz="quarter" idx="5"/>
-          </p:nvPr>
-        </p:nvSpPr>
-        <p:spPr>
-          <a:xfrm>
-            <a:off x="3884613" y="8685213"/>
-            <a:ext cx="2971800" cy="458787"/>
-          </a:xfrm>
-          <a:prstGeom prst="rect">
-            <a:avLst/>
-          </a:prstGeom>
-        </p:spPr>
-        <p:txBody>
-          <a:bodyPr vert="horz" lIns="91440" tIns="45720" rIns="91440" bIns="45720" rtlCol="0" anchor="b"/>
-          <a:lstStyle>
-            <a:lvl1pPr algn="r">
-              <a:defRPr sz="1200"/>
-            </a:lvl1pPr>
-          </a:lstStyle>
-          <a:p>
-            <a:fld id="{CE5E9CC1-C706-0F49-92D6-E571CC5EEA8F}" type="slidenum">
-              <a:rPr lang="en-US"/>
-              <a:t>‹#›</a:t>
-            </a:fld>
-            <a:endParaRPr lang="en-US"/>
-          </a:p>
-        </p:txBody>
-      </p:sp>
     </p:spTree>
     <p:extLst>
       <p:ext uri="{BB962C8B-B14F-4D97-AF65-F5344CB8AC3E}">
-        <p14:creationId xmlns:p14="http://schemas.microsoft.com/office/powerpoint/2010/main" val="1024086991"/>
+        <p14:creationId xmlns:p14="http://schemas.microsoft.com/office/powerpoint/2010/main" val="3175892125"/>
       </p:ext>
     </p:extLst>
   </p:cSld>
@@ -448,10 +311,6 @@
           <a:bodyPr/>
           <a:lstStyle/>
           <a:p>
-            <a:r>
-              <a:rPr lang="en-US" dirty="0"/>
-              <a:t/>
-            </a:r>
             <a:endParaRPr lang="en-US" dirty="0"/>
           </a:p>
         </p:txBody>
@@ -536,10 +395,6 @@
           <a:bodyPr/>
           <a:lstStyle/>
           <a:p>
-            <a:r>
-              <a:rPr lang="en-US" dirty="0"/>
-              <a:t/>
-            </a:r>
             <a:endParaRPr lang="en-US" dirty="0"/>
           </a:p>
         </p:txBody>
@@ -624,10 +479,6 @@
           <a:bodyPr/>
           <a:lstStyle/>
           <a:p>
-            <a:r>
-              <a:rPr lang="en-US" dirty="0"/>
-              <a:t/>
-            </a:r>
             <a:endParaRPr lang="en-US" dirty="0"/>
           </a:p>
         </p:txBody>
@@ -712,10 +563,6 @@
           <a:bodyPr/>
           <a:lstStyle/>
           <a:p>
-            <a:r>
-              <a:rPr lang="en-US" dirty="0"/>
-              <a:t/>
-            </a:r>
             <a:endParaRPr lang="en-US" dirty="0"/>
           </a:p>
         </p:txBody>
@@ -800,10 +647,6 @@
           <a:bodyPr/>
           <a:lstStyle/>
           <a:p>
-            <a:r>
-              <a:rPr lang="en-US" dirty="0"/>
-              <a:t/>
-            </a:r>
             <a:endParaRPr lang="en-US" dirty="0"/>
           </a:p>
         </p:txBody>
@@ -888,10 +731,6 @@
           <a:bodyPr/>
           <a:lstStyle/>
           <a:p>
-            <a:r>
-              <a:rPr lang="en-US" dirty="0"/>
-              <a:t/>
-            </a:r>
             <a:endParaRPr lang="en-US" dirty="0"/>
           </a:p>
         </p:txBody>
@@ -976,10 +815,6 @@
           <a:bodyPr/>
           <a:lstStyle/>
           <a:p>
-            <a:r>
-              <a:rPr lang="en-US" dirty="0"/>
-              <a:t/>
-            </a:r>
             <a:endParaRPr lang="en-US" dirty="0"/>
           </a:p>
         </p:txBody>
@@ -1064,10 +899,6 @@
           <a:bodyPr/>
           <a:lstStyle/>
           <a:p>
-            <a:r>
-              <a:rPr lang="en-US" dirty="0"/>
-              <a:t/>
-            </a:r>
             <a:endParaRPr lang="en-US" dirty="0"/>
           </a:p>
         </p:txBody>
@@ -1152,10 +983,6 @@
           <a:bodyPr/>
           <a:lstStyle/>
           <a:p>
-            <a:r>
-              <a:rPr lang="en-US" dirty="0"/>
-              <a:t/>
-            </a:r>
             <a:endParaRPr lang="en-US" dirty="0"/>
           </a:p>
         </p:txBody>
@@ -1240,10 +1067,6 @@
           <a:bodyPr/>
           <a:lstStyle/>
           <a:p>
-            <a:r>
-              <a:rPr lang="en-US" dirty="0"/>
-              <a:t/>
-            </a:r>
             <a:endParaRPr lang="en-US" dirty="0"/>
           </a:p>
         </p:txBody>
@@ -1328,10 +1151,6 @@
           <a:bodyPr/>
           <a:lstStyle/>
           <a:p>
-            <a:r>
-              <a:rPr lang="en-US" dirty="0"/>
-              <a:t/>
-            </a:r>
             <a:endParaRPr lang="en-US" dirty="0"/>
           </a:p>
         </p:txBody>
@@ -1416,10 +1235,6 @@
           <a:bodyPr/>
           <a:lstStyle/>
           <a:p>
-            <a:r>
-              <a:rPr lang="en-US" dirty="0"/>
-              <a:t/>
-            </a:r>
             <a:endParaRPr lang="en-US" dirty="0"/>
           </a:p>
         </p:txBody>
@@ -1504,10 +1319,6 @@
           <a:bodyPr/>
           <a:lstStyle/>
           <a:p>
-            <a:r>
-              <a:rPr lang="en-US" dirty="0"/>
-              <a:t/>
-            </a:r>
             <a:endParaRPr lang="en-US" dirty="0"/>
           </a:p>
         </p:txBody>
@@ -1592,10 +1403,6 @@
           <a:bodyPr/>
           <a:lstStyle/>
           <a:p>
-            <a:r>
-              <a:rPr lang="en-US" dirty="0"/>
-              <a:t/>
-            </a:r>
             <a:endParaRPr lang="en-US" dirty="0"/>
           </a:p>
         </p:txBody>
@@ -1680,10 +1487,6 @@
           <a:bodyPr/>
           <a:lstStyle/>
           <a:p>
-            <a:r>
-              <a:rPr lang="en-US" dirty="0"/>
-              <a:t/>
-            </a:r>
             <a:endParaRPr lang="en-US" dirty="0"/>
           </a:p>
         </p:txBody>
@@ -1762,6 +1565,7 @@
         <a:solidFill>
           <a:srgbClr val="000000"/>
         </a:solidFill>
+        <a:effectLst/>
       </p:bgPr>
     </p:bg>
     <p:spTree>
@@ -1834,6 +1638,7 @@
         <a:solidFill>
           <a:srgbClr val="000000"/>
         </a:solidFill>
+        <a:effectLst/>
       </p:bgPr>
     </p:bg>
     <p:spTree>
@@ -1906,6 +1711,7 @@
         <a:solidFill>
           <a:srgbClr val="000000"/>
         </a:solidFill>
+        <a:effectLst/>
       </p:bgPr>
     </p:bg>
     <p:spTree>
@@ -1978,6 +1784,7 @@
         <a:solidFill>
           <a:srgbClr val="000000"/>
         </a:solidFill>
+        <a:effectLst/>
       </p:bgPr>
     </p:bg>
     <p:spTree>
@@ -2050,6 +1857,7 @@
         <a:solidFill>
           <a:srgbClr val="000000"/>
         </a:solidFill>
+        <a:effectLst/>
       </p:bgPr>
     </p:bg>
     <p:spTree>
@@ -2122,6 +1930,7 @@
         <a:solidFill>
           <a:srgbClr val="000000"/>
         </a:solidFill>
+        <a:effectLst/>
       </p:bgPr>
     </p:bg>
     <p:spTree>
@@ -2194,6 +2003,7 @@
         <a:solidFill>
           <a:srgbClr val="000000"/>
         </a:solidFill>
+        <a:effectLst/>
       </p:bgPr>
     </p:bg>
     <p:spTree>
@@ -2266,6 +2076,7 @@
         <a:solidFill>
           <a:srgbClr val="000000"/>
         </a:solidFill>
+        <a:effectLst/>
       </p:bgPr>
     </p:bg>
     <p:spTree>
@@ -2338,6 +2149,7 @@
         <a:solidFill>
           <a:srgbClr val="000000"/>
         </a:solidFill>
+        <a:effectLst/>
       </p:bgPr>
     </p:bg>
     <p:spTree>
@@ -2410,6 +2222,7 @@
         <a:solidFill>
           <a:srgbClr val="000000"/>
         </a:solidFill>
+        <a:effectLst/>
       </p:bgPr>
     </p:bg>
     <p:spTree>
@@ -2482,6 +2295,7 @@
         <a:solidFill>
           <a:srgbClr val="000000"/>
         </a:solidFill>
+        <a:effectLst/>
       </p:bgPr>
     </p:bg>
     <p:spTree>
@@ -2554,6 +2368,7 @@
         <a:solidFill>
           <a:srgbClr val="000000"/>
         </a:solidFill>
+        <a:effectLst/>
       </p:bgPr>
     </p:bg>
     <p:spTree>
@@ -2626,6 +2441,7 @@
         <a:solidFill>
           <a:srgbClr val="000000"/>
         </a:solidFill>
+        <a:effectLst/>
       </p:bgPr>
     </p:bg>
     <p:spTree>
@@ -2698,6 +2514,7 @@
         <a:solidFill>
           <a:srgbClr val="000000"/>
         </a:solidFill>
+        <a:effectLst/>
       </p:bgPr>
     </p:bg>
     <p:spTree>
@@ -2770,6 +2587,7 @@
         <a:solidFill>
           <a:srgbClr val="000000"/>
         </a:solidFill>
+        <a:effectLst/>
       </p:bgPr>
     </p:bg>
     <p:spTree>
@@ -2837,6 +2655,11 @@
 <file path=ppt/slideMasters/slideMaster1.xml><?xml version="1.0" encoding="utf-8"?>
 <p:sldMaster xmlns:a="http://schemas.openxmlformats.org/drawingml/2006/main" xmlns:r="http://schemas.openxmlformats.org/officeDocument/2006/relationships" xmlns:p="http://schemas.openxmlformats.org/presentationml/2006/main">
   <p:cSld>
+    <p:bg>
+      <p:bgRef idx="1001">
+        <a:schemeClr val="bg1"/>
+      </p:bgRef>
+    </p:bg>
     <p:spTree>
       <p:nvGrpSpPr>
         <p:cNvPr id="1" name=""/>
@@ -3145,14 +2968,14 @@
       </p:grpSpPr>
       <p:pic>
         <p:nvPicPr>
-          <p:cNvPr id="2" name="Image 0" descr="preencoded.png">    </p:cNvPr>
+          <p:cNvPr id="2" name="Image 0" descr="preencoded.png"/>
           <p:cNvPicPr>
             <a:picLocks noChangeAspect="1"/>
           </p:cNvPicPr>
           <p:nvPr/>
         </p:nvPicPr>
         <p:blipFill>
-          <a:blip r:embed="rId1"/>
+          <a:blip r:embed="rId3"/>
           <a:stretch>
             <a:fillRect/>
           </a:stretch>
@@ -3188,7 +3011,7 @@
           <a:bodyPr wrap="square" lIns="0" tIns="0" rIns="0" bIns="0" rtlCol="0" anchor="t"/>
           <a:lstStyle/>
           <a:p>
-            <a:pPr algn="l" indent="0" marL="0">
+            <a:pPr marL="0" indent="0" algn="l">
               <a:lnSpc>
                 <a:spcPts val="5550"/>
               </a:lnSpc>
@@ -3230,7 +3053,7 @@
           <a:bodyPr wrap="none" lIns="0" tIns="0" rIns="0" bIns="0" rtlCol="0" anchor="t"/>
           <a:lstStyle/>
           <a:p>
-            <a:pPr algn="l" indent="0" marL="0">
+            <a:pPr marL="0" indent="0" algn="l">
               <a:lnSpc>
                 <a:spcPts val="2850"/>
               </a:lnSpc>
@@ -3297,7 +3120,7 @@
           <a:bodyPr wrap="none" lIns="0" tIns="0" rIns="0" bIns="0" rtlCol="0" anchor="t"/>
           <a:lstStyle/>
           <a:p>
-            <a:pPr algn="l" indent="0" marL="0">
+            <a:pPr marL="0" indent="0" algn="l">
               <a:lnSpc>
                 <a:spcPts val="5550"/>
               </a:lnSpc>
@@ -3339,7 +3162,7 @@
           <a:bodyPr wrap="none" lIns="0" tIns="0" rIns="0" bIns="0" rtlCol="0" anchor="t"/>
           <a:lstStyle/>
           <a:p>
-            <a:pPr algn="l" indent="0" marL="0">
+            <a:pPr marL="0" indent="0" algn="l">
               <a:lnSpc>
                 <a:spcPts val="2750"/>
               </a:lnSpc>
@@ -3381,7 +3204,7 @@
           <a:bodyPr wrap="square" lIns="0" tIns="0" rIns="0" bIns="0" rtlCol="0" anchor="t"/>
           <a:lstStyle/>
           <a:p>
-            <a:pPr algn="l" indent="0" marL="0">
+            <a:pPr marL="0" indent="0" algn="l">
               <a:lnSpc>
                 <a:spcPts val="2850"/>
               </a:lnSpc>
@@ -3423,7 +3246,7 @@
           <a:bodyPr wrap="none" lIns="0" tIns="0" rIns="0" bIns="0" rtlCol="0" anchor="t"/>
           <a:lstStyle/>
           <a:p>
-            <a:pPr algn="l" indent="0" marL="0">
+            <a:pPr marL="0" indent="0" algn="l">
               <a:lnSpc>
                 <a:spcPts val="2750"/>
               </a:lnSpc>
@@ -3465,13 +3288,13 @@
           <a:bodyPr wrap="none" lIns="0" tIns="0" rIns="0" bIns="0" rtlCol="0" anchor="t"/>
           <a:lstStyle/>
           <a:p>
-            <a:pPr algn="l" marL="342900" indent="-342900">
+            <a:pPr marL="342900" indent="-342900" algn="l">
               <a:lnSpc>
                 <a:spcPts val="2850"/>
               </a:lnSpc>
               <a:buSzPct val="100000"/>
               <a:buFont typeface="+mj-lt"/>
-              <a:buAutoNum type="arabicPeriod" startAt="1"/>
+              <a:buAutoNum type="arabicPeriod"/>
             </a:pPr>
             <a:r>
               <a:rPr lang="en-US" sz="1750" dirty="0">
@@ -3509,7 +3332,7 @@
           <a:bodyPr wrap="none" lIns="0" tIns="0" rIns="0" bIns="0" rtlCol="0" anchor="t"/>
           <a:lstStyle/>
           <a:p>
-            <a:pPr algn="l" marL="342900" indent="-342900">
+            <a:pPr marL="342900" indent="-342900" algn="l">
               <a:lnSpc>
                 <a:spcPts val="2850"/>
               </a:lnSpc>
@@ -3553,7 +3376,7 @@
           <a:bodyPr wrap="none" lIns="0" tIns="0" rIns="0" bIns="0" rtlCol="0" anchor="t"/>
           <a:lstStyle/>
           <a:p>
-            <a:pPr algn="l" marL="342900" indent="-342900">
+            <a:pPr marL="342900" indent="-342900" algn="l">
               <a:lnSpc>
                 <a:spcPts val="2850"/>
               </a:lnSpc>
@@ -3597,7 +3420,7 @@
           <a:bodyPr wrap="none" lIns="0" tIns="0" rIns="0" bIns="0" rtlCol="0" anchor="t"/>
           <a:lstStyle/>
           <a:p>
-            <a:pPr algn="l" marL="342900" indent="-342900">
+            <a:pPr marL="342900" indent="-342900" algn="l">
               <a:lnSpc>
                 <a:spcPts val="2850"/>
               </a:lnSpc>
@@ -3663,7 +3486,7 @@
           <a:bodyPr wrap="none" lIns="0" tIns="0" rIns="0" bIns="0" rtlCol="0" anchor="t"/>
           <a:lstStyle/>
           <a:p>
-            <a:pPr algn="l" indent="0" marL="0">
+            <a:pPr marL="0" indent="0" algn="l">
               <a:lnSpc>
                 <a:spcPts val="2750"/>
               </a:lnSpc>
@@ -3705,7 +3528,7 @@
           <a:bodyPr wrap="none" lIns="0" tIns="0" rIns="0" bIns="0" rtlCol="0" anchor="t"/>
           <a:lstStyle/>
           <a:p>
-            <a:pPr algn="l" indent="0" marL="0">
+            <a:pPr marL="0" indent="0" algn="l">
               <a:lnSpc>
                 <a:spcPts val="2850"/>
               </a:lnSpc>
@@ -3769,7 +3592,7 @@
           <a:bodyPr wrap="none" lIns="0" tIns="0" rIns="0" bIns="0" rtlCol="0" anchor="t"/>
           <a:lstStyle/>
           <a:p>
-            <a:pPr algn="l" indent="0" marL="0">
+            <a:pPr marL="0" indent="0" algn="l">
               <a:lnSpc>
                 <a:spcPts val="2750"/>
               </a:lnSpc>
@@ -3811,7 +3634,7 @@
           <a:bodyPr wrap="none" lIns="0" tIns="0" rIns="0" bIns="0" rtlCol="0" anchor="t"/>
           <a:lstStyle/>
           <a:p>
-            <a:pPr algn="l" indent="0" marL="0">
+            <a:pPr marL="0" indent="0" algn="l">
               <a:lnSpc>
                 <a:spcPts val="2850"/>
               </a:lnSpc>
@@ -3875,7 +3698,7 @@
           <a:bodyPr wrap="none" lIns="0" tIns="0" rIns="0" bIns="0" rtlCol="0" anchor="t"/>
           <a:lstStyle/>
           <a:p>
-            <a:pPr algn="l" indent="0" marL="0">
+            <a:pPr marL="0" indent="0" algn="l">
               <a:lnSpc>
                 <a:spcPts val="2750"/>
               </a:lnSpc>
@@ -3917,7 +3740,7 @@
           <a:bodyPr wrap="none" lIns="0" tIns="0" rIns="0" bIns="0" rtlCol="0" anchor="t"/>
           <a:lstStyle/>
           <a:p>
-            <a:pPr algn="l" indent="0" marL="0">
+            <a:pPr marL="0" indent="0" algn="l">
               <a:lnSpc>
                 <a:spcPts val="2850"/>
               </a:lnSpc>
@@ -3984,7 +3807,7 @@
           <a:bodyPr wrap="none" lIns="0" tIns="0" rIns="0" bIns="0" rtlCol="0" anchor="t"/>
           <a:lstStyle/>
           <a:p>
-            <a:pPr algn="l" indent="0" marL="0">
+            <a:pPr marL="0" indent="0" algn="l">
               <a:lnSpc>
                 <a:spcPts val="5550"/>
               </a:lnSpc>
@@ -4026,7 +3849,7 @@
           <a:bodyPr wrap="none" lIns="0" tIns="0" rIns="0" bIns="0" rtlCol="0" anchor="t"/>
           <a:lstStyle/>
           <a:p>
-            <a:pPr algn="l" indent="0" marL="0">
+            <a:pPr marL="0" indent="0" algn="l">
               <a:lnSpc>
                 <a:spcPts val="2750"/>
               </a:lnSpc>
@@ -4068,7 +3891,7 @@
           <a:bodyPr wrap="square" lIns="0" tIns="0" rIns="0" bIns="0" rtlCol="0" anchor="t"/>
           <a:lstStyle/>
           <a:p>
-            <a:pPr algn="l" indent="0" marL="0">
+            <a:pPr marL="0" indent="0" algn="l">
               <a:lnSpc>
                 <a:spcPts val="2850"/>
               </a:lnSpc>
@@ -4110,7 +3933,7 @@
           <a:bodyPr wrap="none" lIns="0" tIns="0" rIns="0" bIns="0" rtlCol="0" anchor="t"/>
           <a:lstStyle/>
           <a:p>
-            <a:pPr algn="l" indent="0" marL="0">
+            <a:pPr marL="0" indent="0" algn="l">
               <a:lnSpc>
                 <a:spcPts val="2750"/>
               </a:lnSpc>
@@ -4152,7 +3975,7 @@
           <a:bodyPr wrap="square" lIns="0" tIns="0" rIns="0" bIns="0" rtlCol="0" anchor="t"/>
           <a:lstStyle/>
           <a:p>
-            <a:pPr algn="l" indent="0" marL="0">
+            <a:pPr marL="0" indent="0" algn="l">
               <a:lnSpc>
                 <a:spcPts val="2850"/>
               </a:lnSpc>
@@ -4194,7 +4017,7 @@
           <a:bodyPr wrap="none" lIns="0" tIns="0" rIns="0" bIns="0" rtlCol="0" anchor="t"/>
           <a:lstStyle/>
           <a:p>
-            <a:pPr algn="l" indent="0" marL="0">
+            <a:pPr marL="0" indent="0" algn="l">
               <a:lnSpc>
                 <a:spcPts val="2750"/>
               </a:lnSpc>
@@ -4236,7 +4059,7 @@
           <a:bodyPr wrap="square" lIns="0" tIns="0" rIns="0" bIns="0" rtlCol="0" anchor="t"/>
           <a:lstStyle/>
           <a:p>
-            <a:pPr algn="l" indent="0" marL="0">
+            <a:pPr marL="0" indent="0" algn="l">
               <a:lnSpc>
                 <a:spcPts val="2850"/>
               </a:lnSpc>
@@ -4303,7 +4126,7 @@
           <a:bodyPr wrap="none" lIns="0" tIns="0" rIns="0" bIns="0" rtlCol="0" anchor="t"/>
           <a:lstStyle/>
           <a:p>
-            <a:pPr algn="l" indent="0" marL="0">
+            <a:pPr marL="0" indent="0" algn="l">
               <a:lnSpc>
                 <a:spcPts val="5550"/>
               </a:lnSpc>
@@ -4411,7 +4234,7 @@
           <a:bodyPr wrap="none" lIns="0" tIns="0" rIns="0" bIns="0" rtlCol="0" anchor="t"/>
           <a:lstStyle/>
           <a:p>
-            <a:pPr algn="ctr" indent="0" marL="0">
+            <a:pPr marL="0" indent="0" algn="ctr">
               <a:lnSpc>
                 <a:spcPts val="2650"/>
               </a:lnSpc>
@@ -4453,7 +4276,7 @@
           <a:bodyPr wrap="none" lIns="0" tIns="0" rIns="0" bIns="0" rtlCol="0" anchor="t"/>
           <a:lstStyle/>
           <a:p>
-            <a:pPr algn="ctr" indent="0" marL="0">
+            <a:pPr marL="0" indent="0" algn="ctr">
               <a:lnSpc>
                 <a:spcPts val="2750"/>
               </a:lnSpc>
@@ -4495,7 +4318,7 @@
           <a:bodyPr wrap="none" lIns="0" tIns="0" rIns="0" bIns="0" rtlCol="0" anchor="t"/>
           <a:lstStyle/>
           <a:p>
-            <a:pPr algn="ctr" indent="0" marL="0">
+            <a:pPr marL="0" indent="0" algn="ctr">
               <a:lnSpc>
                 <a:spcPts val="2850"/>
               </a:lnSpc>
@@ -4581,7 +4404,7 @@
           <a:bodyPr wrap="none" lIns="0" tIns="0" rIns="0" bIns="0" rtlCol="0" anchor="t"/>
           <a:lstStyle/>
           <a:p>
-            <a:pPr algn="ctr" indent="0" marL="0">
+            <a:pPr marL="0" indent="0" algn="ctr">
               <a:lnSpc>
                 <a:spcPts val="2650"/>
               </a:lnSpc>
@@ -4623,7 +4446,7 @@
           <a:bodyPr wrap="none" lIns="0" tIns="0" rIns="0" bIns="0" rtlCol="0" anchor="t"/>
           <a:lstStyle/>
           <a:p>
-            <a:pPr algn="ctr" indent="0" marL="0">
+            <a:pPr marL="0" indent="0" algn="ctr">
               <a:lnSpc>
                 <a:spcPts val="2750"/>
               </a:lnSpc>
@@ -4665,7 +4488,7 @@
           <a:bodyPr wrap="none" lIns="0" tIns="0" rIns="0" bIns="0" rtlCol="0" anchor="t"/>
           <a:lstStyle/>
           <a:p>
-            <a:pPr algn="ctr" indent="0" marL="0">
+            <a:pPr marL="0" indent="0" algn="ctr">
               <a:lnSpc>
                 <a:spcPts val="2850"/>
               </a:lnSpc>
@@ -4751,7 +4574,7 @@
           <a:bodyPr wrap="none" lIns="0" tIns="0" rIns="0" bIns="0" rtlCol="0" anchor="t"/>
           <a:lstStyle/>
           <a:p>
-            <a:pPr algn="ctr" indent="0" marL="0">
+            <a:pPr marL="0" indent="0" algn="ctr">
               <a:lnSpc>
                 <a:spcPts val="2650"/>
               </a:lnSpc>
@@ -4793,7 +4616,7 @@
           <a:bodyPr wrap="none" lIns="0" tIns="0" rIns="0" bIns="0" rtlCol="0" anchor="t"/>
           <a:lstStyle/>
           <a:p>
-            <a:pPr algn="ctr" indent="0" marL="0">
+            <a:pPr marL="0" indent="0" algn="ctr">
               <a:lnSpc>
                 <a:spcPts val="2750"/>
               </a:lnSpc>
@@ -4835,7 +4658,7 @@
           <a:bodyPr wrap="none" lIns="0" tIns="0" rIns="0" bIns="0" rtlCol="0" anchor="t"/>
           <a:lstStyle/>
           <a:p>
-            <a:pPr algn="ctr" indent="0" marL="0">
+            <a:pPr marL="0" indent="0" algn="ctr">
               <a:lnSpc>
                 <a:spcPts val="2850"/>
               </a:lnSpc>
@@ -4921,7 +4744,7 @@
           <a:bodyPr wrap="none" lIns="0" tIns="0" rIns="0" bIns="0" rtlCol="0" anchor="t"/>
           <a:lstStyle/>
           <a:p>
-            <a:pPr algn="ctr" indent="0" marL="0">
+            <a:pPr marL="0" indent="0" algn="ctr">
               <a:lnSpc>
                 <a:spcPts val="2650"/>
               </a:lnSpc>
@@ -4963,7 +4786,7 @@
           <a:bodyPr wrap="none" lIns="0" tIns="0" rIns="0" bIns="0" rtlCol="0" anchor="t"/>
           <a:lstStyle/>
           <a:p>
-            <a:pPr algn="ctr" indent="0" marL="0">
+            <a:pPr marL="0" indent="0" algn="ctr">
               <a:lnSpc>
                 <a:spcPts val="2750"/>
               </a:lnSpc>
@@ -5005,7 +4828,7 @@
           <a:bodyPr wrap="none" lIns="0" tIns="0" rIns="0" bIns="0" rtlCol="0" anchor="t"/>
           <a:lstStyle/>
           <a:p>
-            <a:pPr algn="ctr" indent="0" marL="0">
+            <a:pPr marL="0" indent="0" algn="ctr">
               <a:lnSpc>
                 <a:spcPts val="2850"/>
               </a:lnSpc>
@@ -5047,7 +4870,7 @@
           <a:bodyPr wrap="none" lIns="0" tIns="0" rIns="0" bIns="0" rtlCol="0" anchor="t"/>
           <a:lstStyle/>
           <a:p>
-            <a:pPr algn="l" indent="0" marL="0">
+            <a:pPr marL="0" indent="0" algn="l">
               <a:lnSpc>
                 <a:spcPts val="2850"/>
               </a:lnSpc>
@@ -5114,7 +4937,7 @@
           <a:bodyPr wrap="none" lIns="0" tIns="0" rIns="0" bIns="0" rtlCol="0" anchor="t"/>
           <a:lstStyle/>
           <a:p>
-            <a:pPr algn="l" indent="0" marL="0">
+            <a:pPr marL="0" indent="0" algn="l">
               <a:lnSpc>
                 <a:spcPts val="5550"/>
               </a:lnSpc>
@@ -5183,7 +5006,7 @@
           <a:bodyPr wrap="none" lIns="0" tIns="0" rIns="0" bIns="0" rtlCol="0" anchor="t"/>
           <a:lstStyle/>
           <a:p>
-            <a:pPr algn="l" indent="0" marL="0">
+            <a:pPr marL="0" indent="0" algn="l">
               <a:lnSpc>
                 <a:spcPts val="2750"/>
               </a:lnSpc>
@@ -5225,7 +5048,7 @@
           <a:bodyPr wrap="square" lIns="0" tIns="0" rIns="0" bIns="0" rtlCol="0" anchor="t"/>
           <a:lstStyle/>
           <a:p>
-            <a:pPr algn="l" indent="0" marL="0">
+            <a:pPr marL="0" indent="0" algn="l">
               <a:lnSpc>
                 <a:spcPts val="2850"/>
               </a:lnSpc>
@@ -5294,7 +5117,7 @@
           <a:bodyPr wrap="none" lIns="0" tIns="0" rIns="0" bIns="0" rtlCol="0" anchor="t"/>
           <a:lstStyle/>
           <a:p>
-            <a:pPr algn="l" indent="0" marL="0">
+            <a:pPr marL="0" indent="0" algn="l">
               <a:lnSpc>
                 <a:spcPts val="2750"/>
               </a:lnSpc>
@@ -5336,7 +5159,7 @@
           <a:bodyPr wrap="square" lIns="0" tIns="0" rIns="0" bIns="0" rtlCol="0" anchor="t"/>
           <a:lstStyle/>
           <a:p>
-            <a:pPr algn="l" indent="0" marL="0">
+            <a:pPr marL="0" indent="0" algn="l">
               <a:lnSpc>
                 <a:spcPts val="2850"/>
               </a:lnSpc>
@@ -5405,7 +5228,7 @@
           <a:bodyPr wrap="none" lIns="0" tIns="0" rIns="0" bIns="0" rtlCol="0" anchor="t"/>
           <a:lstStyle/>
           <a:p>
-            <a:pPr algn="l" indent="0" marL="0">
+            <a:pPr marL="0" indent="0" algn="l">
               <a:lnSpc>
                 <a:spcPts val="2750"/>
               </a:lnSpc>
@@ -5447,7 +5270,7 @@
           <a:bodyPr wrap="square" lIns="0" tIns="0" rIns="0" bIns="0" rtlCol="0" anchor="t"/>
           <a:lstStyle/>
           <a:p>
-            <a:pPr algn="l" indent="0" marL="0">
+            <a:pPr marL="0" indent="0" algn="l">
               <a:lnSpc>
                 <a:spcPts val="2850"/>
               </a:lnSpc>
@@ -5516,7 +5339,7 @@
           <a:bodyPr wrap="none" lIns="0" tIns="0" rIns="0" bIns="0" rtlCol="0" anchor="t"/>
           <a:lstStyle/>
           <a:p>
-            <a:pPr algn="l" indent="0" marL="0">
+            <a:pPr marL="0" indent="0" algn="l">
               <a:lnSpc>
                 <a:spcPts val="2750"/>
               </a:lnSpc>
@@ -5558,7 +5381,7 @@
           <a:bodyPr wrap="square" lIns="0" tIns="0" rIns="0" bIns="0" rtlCol="0" anchor="t"/>
           <a:lstStyle/>
           <a:p>
-            <a:pPr algn="l" indent="0" marL="0">
+            <a:pPr marL="0" indent="0" algn="l">
               <a:lnSpc>
                 <a:spcPts val="2850"/>
               </a:lnSpc>
@@ -5625,7 +5448,7 @@
           <a:bodyPr wrap="none" lIns="0" tIns="0" rIns="0" bIns="0" rtlCol="0" anchor="t"/>
           <a:lstStyle/>
           <a:p>
-            <a:pPr algn="l" indent="0" marL="0">
+            <a:pPr marL="0" indent="0" algn="l">
               <a:lnSpc>
                 <a:spcPts val="5550"/>
               </a:lnSpc>
@@ -5667,7 +5490,7 @@
           <a:bodyPr wrap="none" lIns="0" tIns="0" rIns="0" bIns="0" rtlCol="0" anchor="t"/>
           <a:lstStyle/>
           <a:p>
-            <a:pPr algn="l" indent="0" marL="0">
+            <a:pPr marL="0" indent="0" algn="l">
               <a:lnSpc>
                 <a:spcPts val="2750"/>
               </a:lnSpc>
@@ -5753,7 +5576,7 @@
           <a:bodyPr wrap="none" lIns="0" tIns="0" rIns="0" bIns="0" rtlCol="0" anchor="t"/>
           <a:lstStyle/>
           <a:p>
-            <a:pPr algn="l" indent="0" marL="0">
+            <a:pPr marL="0" indent="0" algn="l">
               <a:lnSpc>
                 <a:spcPts val="2200"/>
               </a:lnSpc>
@@ -5795,7 +5618,7 @@
           <a:bodyPr wrap="none" lIns="0" tIns="0" rIns="0" bIns="0" rtlCol="0" anchor="t"/>
           <a:lstStyle/>
           <a:p>
-            <a:pPr algn="l" indent="0" marL="0">
+            <a:pPr marL="0" indent="0" algn="l">
               <a:lnSpc>
                 <a:spcPts val="2750"/>
               </a:lnSpc>
@@ -5881,7 +5704,7 @@
           <a:bodyPr wrap="none" lIns="0" tIns="0" rIns="0" bIns="0" rtlCol="0" anchor="t"/>
           <a:lstStyle/>
           <a:p>
-            <a:pPr algn="l" indent="0" marL="0">
+            <a:pPr marL="0" indent="0" algn="l">
               <a:lnSpc>
                 <a:spcPts val="2200"/>
               </a:lnSpc>
@@ -5923,7 +5746,7 @@
           <a:bodyPr wrap="none" lIns="0" tIns="0" rIns="0" bIns="0" rtlCol="0" anchor="t"/>
           <a:lstStyle/>
           <a:p>
-            <a:pPr algn="l" indent="0" marL="0">
+            <a:pPr marL="0" indent="0" algn="l">
               <a:lnSpc>
                 <a:spcPts val="2750"/>
               </a:lnSpc>
@@ -6009,7 +5832,7 @@
           <a:bodyPr wrap="none" lIns="0" tIns="0" rIns="0" bIns="0" rtlCol="0" anchor="t"/>
           <a:lstStyle/>
           <a:p>
-            <a:pPr algn="l" indent="0" marL="0">
+            <a:pPr marL="0" indent="0" algn="l">
               <a:lnSpc>
                 <a:spcPts val="2200"/>
               </a:lnSpc>
@@ -6051,7 +5874,7 @@
           <a:bodyPr wrap="none" lIns="0" tIns="0" rIns="0" bIns="0" rtlCol="0" anchor="t"/>
           <a:lstStyle/>
           <a:p>
-            <a:pPr algn="l" indent="0" marL="0">
+            <a:pPr marL="0" indent="0" algn="l">
               <a:lnSpc>
                 <a:spcPts val="2750"/>
               </a:lnSpc>
@@ -6093,7 +5916,7 @@
           <a:bodyPr wrap="none" lIns="0" tIns="0" rIns="0" bIns="0" rtlCol="0" anchor="t"/>
           <a:lstStyle/>
           <a:p>
-            <a:pPr algn="l" indent="0" marL="0">
+            <a:pPr marL="0" indent="0" algn="l">
               <a:lnSpc>
                 <a:spcPts val="2750"/>
               </a:lnSpc>
@@ -6179,7 +6002,7 @@
           <a:bodyPr wrap="none" lIns="0" tIns="0" rIns="0" bIns="0" rtlCol="0" anchor="t"/>
           <a:lstStyle/>
           <a:p>
-            <a:pPr algn="l" indent="0" marL="0">
+            <a:pPr marL="0" indent="0" algn="l">
               <a:lnSpc>
                 <a:spcPts val="2200"/>
               </a:lnSpc>
@@ -6221,7 +6044,7 @@
           <a:bodyPr wrap="none" lIns="0" tIns="0" rIns="0" bIns="0" rtlCol="0" anchor="t"/>
           <a:lstStyle/>
           <a:p>
-            <a:pPr algn="l" indent="0" marL="0">
+            <a:pPr marL="0" indent="0" algn="l">
               <a:lnSpc>
                 <a:spcPts val="2750"/>
               </a:lnSpc>
@@ -6307,7 +6130,7 @@
           <a:bodyPr wrap="none" lIns="0" tIns="0" rIns="0" bIns="0" rtlCol="0" anchor="t"/>
           <a:lstStyle/>
           <a:p>
-            <a:pPr algn="l" indent="0" marL="0">
+            <a:pPr marL="0" indent="0" algn="l">
               <a:lnSpc>
                 <a:spcPts val="2200"/>
               </a:lnSpc>
@@ -6349,7 +6172,7 @@
           <a:bodyPr wrap="none" lIns="0" tIns="0" rIns="0" bIns="0" rtlCol="0" anchor="t"/>
           <a:lstStyle/>
           <a:p>
-            <a:pPr algn="l" indent="0" marL="0">
+            <a:pPr marL="0" indent="0" algn="l">
               <a:lnSpc>
                 <a:spcPts val="2750"/>
               </a:lnSpc>
@@ -6391,7 +6214,7 @@
           <a:bodyPr wrap="none" lIns="0" tIns="0" rIns="0" bIns="0" rtlCol="0" anchor="t"/>
           <a:lstStyle/>
           <a:p>
-            <a:pPr algn="l" indent="0" marL="0">
+            <a:pPr marL="0" indent="0" algn="l">
               <a:lnSpc>
                 <a:spcPts val="2750"/>
               </a:lnSpc>
@@ -6433,7 +6256,7 @@
           <a:bodyPr wrap="none" lIns="0" tIns="0" rIns="0" bIns="0" rtlCol="0" anchor="t"/>
           <a:lstStyle/>
           <a:p>
-            <a:pPr algn="l" marL="342900" indent="-342900">
+            <a:pPr marL="342900" indent="-342900" algn="l">
               <a:lnSpc>
                 <a:spcPts val="2850"/>
               </a:lnSpc>
@@ -6476,7 +6299,7 @@
           <a:bodyPr wrap="none" lIns="0" tIns="0" rIns="0" bIns="0" rtlCol="0" anchor="t"/>
           <a:lstStyle/>
           <a:p>
-            <a:pPr algn="l" marL="342900" indent="-342900">
+            <a:pPr marL="342900" indent="-342900" algn="l">
               <a:lnSpc>
                 <a:spcPts val="2850"/>
               </a:lnSpc>
@@ -6519,7 +6342,7 @@
           <a:bodyPr wrap="none" lIns="0" tIns="0" rIns="0" bIns="0" rtlCol="0" anchor="t"/>
           <a:lstStyle/>
           <a:p>
-            <a:pPr algn="l" marL="342900" indent="-342900">
+            <a:pPr marL="342900" indent="-342900" algn="l">
               <a:lnSpc>
                 <a:spcPts val="2850"/>
               </a:lnSpc>
@@ -6587,7 +6410,7 @@
           <a:bodyPr wrap="none" lIns="0" tIns="0" rIns="0" bIns="0" rtlCol="0" anchor="t"/>
           <a:lstStyle/>
           <a:p>
-            <a:pPr algn="l" indent="0" marL="0">
+            <a:pPr marL="0" indent="0" algn="l">
               <a:lnSpc>
                 <a:spcPts val="5550"/>
               </a:lnSpc>
@@ -6673,7 +6496,7 @@
           <a:bodyPr wrap="none" lIns="0" tIns="0" rIns="0" bIns="0" rtlCol="0" anchor="t"/>
           <a:lstStyle/>
           <a:p>
-            <a:pPr algn="l" indent="0" marL="0">
+            <a:pPr marL="0" indent="0" algn="l">
               <a:lnSpc>
                 <a:spcPts val="2750"/>
               </a:lnSpc>
@@ -6715,7 +6538,7 @@
           <a:bodyPr wrap="square" lIns="0" tIns="0" rIns="0" bIns="0" rtlCol="0" anchor="t"/>
           <a:lstStyle/>
           <a:p>
-            <a:pPr algn="l" indent="0" marL="0">
+            <a:pPr marL="0" indent="0" algn="l">
               <a:lnSpc>
                 <a:spcPts val="2850"/>
               </a:lnSpc>
@@ -6799,7 +6622,7 @@
           <a:bodyPr wrap="none" lIns="0" tIns="0" rIns="0" bIns="0" rtlCol="0" anchor="t"/>
           <a:lstStyle/>
           <a:p>
-            <a:pPr algn="l" indent="0" marL="0">
+            <a:pPr marL="0" indent="0" algn="l">
               <a:lnSpc>
                 <a:spcPts val="2750"/>
               </a:lnSpc>
@@ -6841,7 +6664,7 @@
           <a:bodyPr wrap="square" lIns="0" tIns="0" rIns="0" bIns="0" rtlCol="0" anchor="t"/>
           <a:lstStyle/>
           <a:p>
-            <a:pPr algn="l" indent="0" marL="0">
+            <a:pPr marL="0" indent="0" algn="l">
               <a:lnSpc>
                 <a:spcPts val="2850"/>
               </a:lnSpc>
@@ -6925,7 +6748,7 @@
           <a:bodyPr wrap="none" lIns="0" tIns="0" rIns="0" bIns="0" rtlCol="0" anchor="t"/>
           <a:lstStyle/>
           <a:p>
-            <a:pPr algn="l" indent="0" marL="0">
+            <a:pPr marL="0" indent="0" algn="l">
               <a:lnSpc>
                 <a:spcPts val="2750"/>
               </a:lnSpc>
@@ -6967,7 +6790,7 @@
           <a:bodyPr wrap="square" lIns="0" tIns="0" rIns="0" bIns="0" rtlCol="0" anchor="t"/>
           <a:lstStyle/>
           <a:p>
-            <a:pPr algn="l" indent="0" marL="0">
+            <a:pPr marL="0" indent="0" algn="l">
               <a:lnSpc>
                 <a:spcPts val="2850"/>
               </a:lnSpc>
@@ -7051,7 +6874,7 @@
           <a:bodyPr wrap="none" lIns="0" tIns="0" rIns="0" bIns="0" rtlCol="0" anchor="t"/>
           <a:lstStyle/>
           <a:p>
-            <a:pPr algn="l" indent="0" marL="0">
+            <a:pPr marL="0" indent="0" algn="l">
               <a:lnSpc>
                 <a:spcPts val="2750"/>
               </a:lnSpc>
@@ -7093,7 +6916,7 @@
           <a:bodyPr wrap="none" lIns="0" tIns="0" rIns="0" bIns="0" rtlCol="0" anchor="t"/>
           <a:lstStyle/>
           <a:p>
-            <a:pPr algn="l" indent="0" marL="0">
+            <a:pPr marL="0" indent="0" algn="l">
               <a:lnSpc>
                 <a:spcPts val="2850"/>
               </a:lnSpc>
@@ -7199,7 +7022,7 @@
           <a:bodyPr wrap="none" lIns="0" tIns="0" rIns="0" bIns="0" rtlCol="0" anchor="t"/>
           <a:lstStyle/>
           <a:p>
-            <a:pPr algn="l" indent="0" marL="0">
+            <a:pPr marL="0" indent="0" algn="l">
               <a:lnSpc>
                 <a:spcPts val="2750"/>
               </a:lnSpc>
@@ -7241,7 +7064,7 @@
           <a:bodyPr wrap="none" lIns="0" tIns="0" rIns="0" bIns="0" rtlCol="0" anchor="t"/>
           <a:lstStyle/>
           <a:p>
-            <a:pPr algn="l" indent="0" marL="0">
+            <a:pPr marL="0" indent="0" algn="l">
               <a:lnSpc>
                 <a:spcPts val="2850"/>
               </a:lnSpc>
@@ -7283,7 +7106,7 @@
           <a:bodyPr wrap="none" lIns="0" tIns="0" rIns="0" bIns="0" rtlCol="0" anchor="t"/>
           <a:lstStyle/>
           <a:p>
-            <a:pPr algn="l" indent="0" marL="0">
+            <a:pPr marL="0" indent="0" algn="l">
               <a:lnSpc>
                 <a:spcPts val="2850"/>
               </a:lnSpc>
@@ -7298,7 +7121,7 @@
                 <a:ea typeface="Lora" pitchFamily="34" charset="-122"/>
                 <a:cs typeface="Lora" pitchFamily="34" charset="-120"/>
               </a:rPr>
-              <a:t>專案負責人: Howie / QA Team | 文件版本: 1.0 | 最後更新: 2025-10-29</a:t>
+              <a:t>專案負責人: Howie | 文件版本: 1.0 | 最後更新: 2025-10-29</a:t>
             </a:r>
             <a:endParaRPr lang="en-US" sz="1750" dirty="0"/>
           </a:p>
@@ -7350,7 +7173,7 @@
           <a:bodyPr wrap="none" lIns="0" tIns="0" rIns="0" bIns="0" rtlCol="0" anchor="t"/>
           <a:lstStyle/>
           <a:p>
-            <a:pPr algn="l" indent="0" marL="0">
+            <a:pPr marL="0" indent="0" algn="l">
               <a:lnSpc>
                 <a:spcPts val="5550"/>
               </a:lnSpc>
@@ -7417,165 +7240,7 @@
       </p:sp>
       <p:pic>
         <p:nvPicPr>
-          <p:cNvPr id="5" name="Image 0" descr="preencoded.png">    </p:cNvPr>
-          <p:cNvPicPr>
-            <a:picLocks noChangeAspect="1"/>
-          </p:cNvPicPr>
-          <p:nvPr/>
-        </p:nvPicPr>
-        <p:blipFill>
-          <a:blip r:embed="rId1">
-            <a:extLst>
-              <a:ext uri="{96DAC541-7B7A-43D3-8B79-37D633B846F1}">
-                <asvg:svgBlip xmlns:asvg="http://schemas.microsoft.com/office/drawing/2016/SVG/main" r:embed="rId2"/>
-              </a:ext>
-            </a:extLst>
-          </a:blip>
-          <a:stretch>
-            <a:fillRect/>
-          </a:stretch>
-        </p:blipFill>
-        <p:spPr>
-          <a:xfrm>
-            <a:off x="1207770" y="2600801"/>
-            <a:ext cx="306110" cy="306110"/>
-          </a:xfrm>
-          <a:prstGeom prst="rect">
-            <a:avLst/>
-          </a:prstGeom>
-        </p:spPr>
-      </p:pic>
-      <p:sp>
-        <p:nvSpPr>
-          <p:cNvPr id="6" name="Text 3"/>
-          <p:cNvSpPr/>
-          <p:nvPr/>
-        </p:nvSpPr>
-        <p:spPr>
-          <a:xfrm>
-            <a:off x="1020604" y="3321010"/>
-            <a:ext cx="2835235" cy="354330"/>
-          </a:xfrm>
-          <a:prstGeom prst="rect">
-            <a:avLst/>
-          </a:prstGeom>
-          <a:noFill/>
-          <a:ln/>
-        </p:spPr>
-        <p:txBody>
-          <a:bodyPr wrap="none" lIns="0" tIns="0" rIns="0" bIns="0" rtlCol="0" anchor="t"/>
-          <a:lstStyle/>
-          <a:p>
-            <a:pPr algn="l" indent="0" marL="0">
-              <a:lnSpc>
-                <a:spcPts val="2750"/>
-              </a:lnSpc>
-              <a:buNone/>
-            </a:pPr>
-            <a:r>
-              <a:rPr lang="en-US" sz="2200" dirty="0">
-                <a:solidFill>
-                  <a:srgbClr val="2C2821"/>
-                </a:solidFill>
-                <a:latin typeface="Alice" pitchFamily="34" charset="0"/>
-                <a:ea typeface="Alice" pitchFamily="34" charset="-122"/>
-                <a:cs typeface="Alice" pitchFamily="34" charset="-120"/>
-              </a:rPr>
-              <a:t>程式碼品質管控</a:t>
-            </a:r>
-            <a:endParaRPr lang="en-US" sz="2200" dirty="0"/>
-          </a:p>
-        </p:txBody>
-      </p:sp>
-      <p:sp>
-        <p:nvSpPr>
-          <p:cNvPr id="7" name="Text 4"/>
-          <p:cNvSpPr/>
-          <p:nvPr/>
-        </p:nvSpPr>
-        <p:spPr>
-          <a:xfrm>
-            <a:off x="1020604" y="3811429"/>
-            <a:ext cx="5954316" cy="725805"/>
-          </a:xfrm>
-          <a:prstGeom prst="rect">
-            <a:avLst/>
-          </a:prstGeom>
-          <a:noFill/>
-          <a:ln/>
-        </p:spPr>
-        <p:txBody>
-          <a:bodyPr wrap="square" lIns="0" tIns="0" rIns="0" bIns="0" rtlCol="0" anchor="t"/>
-          <a:lstStyle/>
-          <a:p>
-            <a:pPr algn="l" indent="0" marL="0">
-              <a:lnSpc>
-                <a:spcPts val="2850"/>
-              </a:lnSpc>
-              <a:buNone/>
-            </a:pPr>
-            <a:r>
-              <a:rPr lang="en-US" sz="1750" dirty="0">
-                <a:solidFill>
-                  <a:srgbClr val="2C2821"/>
-                </a:solidFill>
-                <a:latin typeface="Lora" pitchFamily="34" charset="0"/>
-                <a:ea typeface="Lora" pitchFamily="34" charset="-122"/>
-                <a:cs typeface="Lora" pitchFamily="34" charset="-120"/>
-              </a:rPr>
-              <a:t>RD 提交前必須通過測試驗證，確保每一行程式碼都符合品質標準</a:t>
-            </a:r>
-            <a:endParaRPr lang="en-US" sz="1750" dirty="0"/>
-          </a:p>
-        </p:txBody>
-      </p:sp>
-      <p:sp>
-        <p:nvSpPr>
-          <p:cNvPr id="8" name="Shape 5"/>
-          <p:cNvSpPr/>
-          <p:nvPr/>
-        </p:nvSpPr>
-        <p:spPr>
-          <a:xfrm>
-            <a:off x="7428548" y="2186940"/>
-            <a:ext cx="6408063" cy="2577108"/>
-          </a:xfrm>
-          <a:prstGeom prst="roundRect">
-            <a:avLst>
-              <a:gd name="adj" fmla="val 1320"/>
-            </a:avLst>
-          </a:prstGeom>
-          <a:solidFill>
-            <a:srgbClr val="F0EDE6"/>
-          </a:solidFill>
-          <a:ln/>
-        </p:spPr>
-      </p:sp>
-      <p:sp>
-        <p:nvSpPr>
-          <p:cNvPr id="9" name="Shape 6"/>
-          <p:cNvSpPr/>
-          <p:nvPr/>
-        </p:nvSpPr>
-        <p:spPr>
-          <a:xfrm>
-            <a:off x="7655362" y="2413754"/>
-            <a:ext cx="680442" cy="680442"/>
-          </a:xfrm>
-          <a:prstGeom prst="roundRect">
-            <a:avLst>
-              <a:gd name="adj" fmla="val 13436980"/>
-            </a:avLst>
-          </a:prstGeom>
-          <a:solidFill>
-            <a:srgbClr val="1B5F39"/>
-          </a:solidFill>
-          <a:ln/>
-        </p:spPr>
-      </p:sp>
-      <p:pic>
-        <p:nvPicPr>
-          <p:cNvPr id="10" name="Image 1" descr="preencoded.png">    </p:cNvPr>
+          <p:cNvPr id="5" name="Image 0" descr="preencoded.png"/>
           <p:cNvPicPr>
             <a:picLocks noChangeAspect="1"/>
           </p:cNvPicPr>
@@ -7595,7 +7260,7 @@
         </p:blipFill>
         <p:spPr>
           <a:xfrm>
-            <a:off x="7842528" y="2600801"/>
+            <a:off x="1207770" y="2600801"/>
             <a:ext cx="306110" cy="306110"/>
           </a:xfrm>
           <a:prstGeom prst="rect">
@@ -7605,13 +7270,13 @@
       </p:pic>
       <p:sp>
         <p:nvSpPr>
-          <p:cNvPr id="11" name="Text 7"/>
-          <p:cNvSpPr/>
-          <p:nvPr/>
-        </p:nvSpPr>
-        <p:spPr>
-          <a:xfrm>
-            <a:off x="7655362" y="3321010"/>
+          <p:cNvPr id="6" name="Text 3"/>
+          <p:cNvSpPr/>
+          <p:nvPr/>
+        </p:nvSpPr>
+        <p:spPr>
+          <a:xfrm>
+            <a:off x="1020604" y="3321010"/>
             <a:ext cx="2835235" cy="354330"/>
           </a:xfrm>
           <a:prstGeom prst="rect">
@@ -7624,7 +7289,7 @@
           <a:bodyPr wrap="none" lIns="0" tIns="0" rIns="0" bIns="0" rtlCol="0" anchor="t"/>
           <a:lstStyle/>
           <a:p>
-            <a:pPr algn="l" indent="0" marL="0">
+            <a:pPr marL="0" indent="0" algn="l">
               <a:lnSpc>
                 <a:spcPts val="2750"/>
               </a:lnSpc>
@@ -7639,7 +7304,7 @@
                 <a:ea typeface="Alice" pitchFamily="34" charset="-122"/>
                 <a:cs typeface="Alice" pitchFamily="34" charset="-120"/>
               </a:rPr>
-              <a:t>持續回歸測試</a:t>
+              <a:t>程式碼品質管控</a:t>
             </a:r>
             <a:endParaRPr lang="en-US" sz="2200" dirty="0"/>
           </a:p>
@@ -7647,26 +7312,26 @@
       </p:sp>
       <p:sp>
         <p:nvSpPr>
-          <p:cNvPr id="12" name="Text 8"/>
-          <p:cNvSpPr/>
-          <p:nvPr/>
-        </p:nvSpPr>
-        <p:spPr>
-          <a:xfrm>
-            <a:off x="7655362" y="3811429"/>
-            <a:ext cx="5954435" cy="362903"/>
-          </a:xfrm>
-          <a:prstGeom prst="rect">
-            <a:avLst/>
-          </a:prstGeom>
-          <a:noFill/>
-          <a:ln/>
-        </p:spPr>
-        <p:txBody>
-          <a:bodyPr wrap="none" lIns="0" tIns="0" rIns="0" bIns="0" rtlCol="0" anchor="t"/>
-          <a:lstStyle/>
-          <a:p>
-            <a:pPr algn="l" indent="0" marL="0">
+          <p:cNvPr id="7" name="Text 4"/>
+          <p:cNvSpPr/>
+          <p:nvPr/>
+        </p:nvSpPr>
+        <p:spPr>
+          <a:xfrm>
+            <a:off x="1020604" y="3811429"/>
+            <a:ext cx="5954316" cy="725805"/>
+          </a:xfrm>
+          <a:prstGeom prst="rect">
+            <a:avLst/>
+          </a:prstGeom>
+          <a:noFill/>
+          <a:ln/>
+        </p:spPr>
+        <p:txBody>
+          <a:bodyPr wrap="square" lIns="0" tIns="0" rIns="0" bIns="0" rtlCol="0" anchor="t"/>
+          <a:lstStyle/>
+          <a:p>
+            <a:pPr marL="0" indent="0" algn="l">
               <a:lnSpc>
                 <a:spcPts val="2850"/>
               </a:lnSpc>
@@ -7681,7 +7346,7 @@
                 <a:ea typeface="Lora" pitchFamily="34" charset="-122"/>
                 <a:cs typeface="Lora" pitchFamily="34" charset="-120"/>
               </a:rPr>
-              <a:t>每日自動化回歸測試，全面覆蓋系統功能，確保穩定運行</a:t>
+              <a:t>RD 提交前必須通過測試驗證，確保每一行程式碼都符合品質標準</a:t>
             </a:r>
             <a:endParaRPr lang="en-US" sz="1750" dirty="0"/>
           </a:p>
@@ -7689,18 +7354,18 @@
       </p:sp>
       <p:sp>
         <p:nvSpPr>
-          <p:cNvPr id="13" name="Shape 9"/>
-          <p:cNvSpPr/>
-          <p:nvPr/>
-        </p:nvSpPr>
-        <p:spPr>
-          <a:xfrm>
-            <a:off x="793790" y="4990862"/>
-            <a:ext cx="6407944" cy="2214205"/>
+          <p:cNvPr id="8" name="Shape 5"/>
+          <p:cNvSpPr/>
+          <p:nvPr/>
+        </p:nvSpPr>
+        <p:spPr>
+          <a:xfrm>
+            <a:off x="7428548" y="2186940"/>
+            <a:ext cx="6408063" cy="2577108"/>
           </a:xfrm>
           <a:prstGeom prst="roundRect">
             <a:avLst>
-              <a:gd name="adj" fmla="val 1537"/>
+              <a:gd name="adj" fmla="val 1320"/>
             </a:avLst>
           </a:prstGeom>
           <a:solidFill>
@@ -7711,13 +7376,13 @@
       </p:sp>
       <p:sp>
         <p:nvSpPr>
-          <p:cNvPr id="14" name="Shape 10"/>
-          <p:cNvSpPr/>
-          <p:nvPr/>
-        </p:nvSpPr>
-        <p:spPr>
-          <a:xfrm>
-            <a:off x="1020604" y="5217676"/>
+          <p:cNvPr id="9" name="Shape 6"/>
+          <p:cNvSpPr/>
+          <p:nvPr/>
+        </p:nvSpPr>
+        <p:spPr>
+          <a:xfrm>
+            <a:off x="7655362" y="2413754"/>
             <a:ext cx="680442" cy="680442"/>
           </a:xfrm>
           <a:prstGeom prst="roundRect">
@@ -7733,7 +7398,7 @@
       </p:sp>
       <p:pic>
         <p:nvPicPr>
-          <p:cNvPr id="15" name="Image 2" descr="preencoded.png">    </p:cNvPr>
+          <p:cNvPr id="10" name="Image 1" descr="preencoded.png"/>
           <p:cNvPicPr>
             <a:picLocks noChangeAspect="1"/>
           </p:cNvPicPr>
@@ -7753,7 +7418,7 @@
         </p:blipFill>
         <p:spPr>
           <a:xfrm>
-            <a:off x="1207770" y="5404723"/>
+            <a:off x="7842528" y="2600801"/>
             <a:ext cx="306110" cy="306110"/>
           </a:xfrm>
           <a:prstGeom prst="rect">
@@ -7763,13 +7428,13 @@
       </p:pic>
       <p:sp>
         <p:nvSpPr>
-          <p:cNvPr id="16" name="Text 11"/>
-          <p:cNvSpPr/>
-          <p:nvPr/>
-        </p:nvSpPr>
-        <p:spPr>
-          <a:xfrm>
-            <a:off x="1020604" y="6124932"/>
+          <p:cNvPr id="11" name="Text 7"/>
+          <p:cNvSpPr/>
+          <p:nvPr/>
+        </p:nvSpPr>
+        <p:spPr>
+          <a:xfrm>
+            <a:off x="7655362" y="3321010"/>
             <a:ext cx="2835235" cy="354330"/>
           </a:xfrm>
           <a:prstGeom prst="rect">
@@ -7782,7 +7447,7 @@
           <a:bodyPr wrap="none" lIns="0" tIns="0" rIns="0" bIns="0" rtlCol="0" anchor="t"/>
           <a:lstStyle/>
           <a:p>
-            <a:pPr algn="l" indent="0" marL="0">
+            <a:pPr marL="0" indent="0" algn="l">
               <a:lnSpc>
                 <a:spcPts val="2750"/>
               </a:lnSpc>
@@ -7797,7 +7462,7 @@
                 <a:ea typeface="Alice" pitchFamily="34" charset="-122"/>
                 <a:cs typeface="Alice" pitchFamily="34" charset="-120"/>
               </a:rPr>
-              <a:t>壓力測試驗證</a:t>
+              <a:t>持續回歸測試</a:t>
             </a:r>
             <a:endParaRPr lang="en-US" sz="2200" dirty="0"/>
           </a:p>
@@ -7805,26 +7470,26 @@
       </p:sp>
       <p:sp>
         <p:nvSpPr>
-          <p:cNvPr id="17" name="Text 12"/>
-          <p:cNvSpPr/>
-          <p:nvPr/>
-        </p:nvSpPr>
-        <p:spPr>
-          <a:xfrm>
-            <a:off x="1020604" y="6615351"/>
-            <a:ext cx="5954316" cy="362903"/>
-          </a:xfrm>
-          <a:prstGeom prst="rect">
-            <a:avLst/>
-          </a:prstGeom>
-          <a:noFill/>
-          <a:ln/>
-        </p:spPr>
-        <p:txBody>
-          <a:bodyPr wrap="none" lIns="0" tIns="0" rIns="0" bIns="0" rtlCol="0" anchor="t"/>
-          <a:lstStyle/>
-          <a:p>
-            <a:pPr algn="l" indent="0" marL="0">
+          <p:cNvPr id="12" name="Text 8"/>
+          <p:cNvSpPr/>
+          <p:nvPr/>
+        </p:nvSpPr>
+        <p:spPr>
+          <a:xfrm>
+            <a:off x="7655362" y="3811429"/>
+            <a:ext cx="5954435" cy="362903"/>
+          </a:xfrm>
+          <a:prstGeom prst="rect">
+            <a:avLst/>
+          </a:prstGeom>
+          <a:noFill/>
+          <a:ln/>
+        </p:spPr>
+        <p:txBody>
+          <a:bodyPr wrap="none" lIns="0" tIns="0" rIns="0" bIns="0" rtlCol="0" anchor="t"/>
+          <a:lstStyle/>
+          <a:p>
+            <a:pPr marL="0" indent="0" algn="l">
               <a:lnSpc>
                 <a:spcPts val="2850"/>
               </a:lnSpc>
@@ -7839,7 +7504,7 @@
                 <a:ea typeface="Lora" pitchFamily="34" charset="-122"/>
                 <a:cs typeface="Lora" pitchFamily="34" charset="-120"/>
               </a:rPr>
-              <a:t>MTBF 壓力測試機制，驗證系統長時間高負載穩定性</a:t>
+              <a:t>每日自動化回歸測試，全面覆蓋系統功能，確保穩定運行</a:t>
             </a:r>
             <a:endParaRPr lang="en-US" sz="1750" dirty="0"/>
           </a:p>
@@ -7847,14 +7512,14 @@
       </p:sp>
       <p:sp>
         <p:nvSpPr>
-          <p:cNvPr id="18" name="Shape 13"/>
-          <p:cNvSpPr/>
-          <p:nvPr/>
-        </p:nvSpPr>
-        <p:spPr>
-          <a:xfrm>
-            <a:off x="7428548" y="4990862"/>
-            <a:ext cx="6408063" cy="2214205"/>
+          <p:cNvPr id="13" name="Shape 9"/>
+          <p:cNvSpPr/>
+          <p:nvPr/>
+        </p:nvSpPr>
+        <p:spPr>
+          <a:xfrm>
+            <a:off x="793790" y="4990862"/>
+            <a:ext cx="6407944" cy="2214205"/>
           </a:xfrm>
           <a:prstGeom prst="roundRect">
             <a:avLst>
@@ -7869,13 +7534,13 @@
       </p:sp>
       <p:sp>
         <p:nvSpPr>
-          <p:cNvPr id="19" name="Shape 14"/>
-          <p:cNvSpPr/>
-          <p:nvPr/>
-        </p:nvSpPr>
-        <p:spPr>
-          <a:xfrm>
-            <a:off x="7655362" y="5217676"/>
+          <p:cNvPr id="14" name="Shape 10"/>
+          <p:cNvSpPr/>
+          <p:nvPr/>
+        </p:nvSpPr>
+        <p:spPr>
+          <a:xfrm>
+            <a:off x="1020604" y="5217676"/>
             <a:ext cx="680442" cy="680442"/>
           </a:xfrm>
           <a:prstGeom prst="roundRect">
@@ -7891,7 +7556,7 @@
       </p:sp>
       <p:pic>
         <p:nvPicPr>
-          <p:cNvPr id="20" name="Image 3" descr="preencoded.png">    </p:cNvPr>
+          <p:cNvPr id="15" name="Image 2" descr="preencoded.png"/>
           <p:cNvPicPr>
             <a:picLocks noChangeAspect="1"/>
           </p:cNvPicPr>
@@ -7911,7 +7576,7 @@
         </p:blipFill>
         <p:spPr>
           <a:xfrm>
-            <a:off x="7842528" y="5404723"/>
+            <a:off x="1207770" y="5404723"/>
             <a:ext cx="306110" cy="306110"/>
           </a:xfrm>
           <a:prstGeom prst="rect">
@@ -7921,13 +7586,13 @@
       </p:pic>
       <p:sp>
         <p:nvSpPr>
-          <p:cNvPr id="21" name="Text 15"/>
-          <p:cNvSpPr/>
-          <p:nvPr/>
-        </p:nvSpPr>
-        <p:spPr>
-          <a:xfrm>
-            <a:off x="7655362" y="6124932"/>
+          <p:cNvPr id="16" name="Text 11"/>
+          <p:cNvSpPr/>
+          <p:nvPr/>
+        </p:nvSpPr>
+        <p:spPr>
+          <a:xfrm>
+            <a:off x="1020604" y="6124932"/>
             <a:ext cx="2835235" cy="354330"/>
           </a:xfrm>
           <a:prstGeom prst="rect">
@@ -7940,7 +7605,7 @@
           <a:bodyPr wrap="none" lIns="0" tIns="0" rIns="0" bIns="0" rtlCol="0" anchor="t"/>
           <a:lstStyle/>
           <a:p>
-            <a:pPr algn="l" indent="0" marL="0">
+            <a:pPr marL="0" indent="0" algn="l">
               <a:lnSpc>
                 <a:spcPts val="2750"/>
               </a:lnSpc>
@@ -7955,6 +7620,164 @@
                 <a:ea typeface="Alice" pitchFamily="34" charset="-122"/>
                 <a:cs typeface="Alice" pitchFamily="34" charset="-120"/>
               </a:rPr>
+              <a:t>壓力測試驗證</a:t>
+            </a:r>
+            <a:endParaRPr lang="en-US" sz="2200" dirty="0"/>
+          </a:p>
+        </p:txBody>
+      </p:sp>
+      <p:sp>
+        <p:nvSpPr>
+          <p:cNvPr id="17" name="Text 12"/>
+          <p:cNvSpPr/>
+          <p:nvPr/>
+        </p:nvSpPr>
+        <p:spPr>
+          <a:xfrm>
+            <a:off x="1020604" y="6615351"/>
+            <a:ext cx="5954316" cy="362903"/>
+          </a:xfrm>
+          <a:prstGeom prst="rect">
+            <a:avLst/>
+          </a:prstGeom>
+          <a:noFill/>
+          <a:ln/>
+        </p:spPr>
+        <p:txBody>
+          <a:bodyPr wrap="none" lIns="0" tIns="0" rIns="0" bIns="0" rtlCol="0" anchor="t"/>
+          <a:lstStyle/>
+          <a:p>
+            <a:pPr marL="0" indent="0" algn="l">
+              <a:lnSpc>
+                <a:spcPts val="2850"/>
+              </a:lnSpc>
+              <a:buNone/>
+            </a:pPr>
+            <a:r>
+              <a:rPr lang="en-US" sz="1750" dirty="0">
+                <a:solidFill>
+                  <a:srgbClr val="2C2821"/>
+                </a:solidFill>
+                <a:latin typeface="Lora" pitchFamily="34" charset="0"/>
+                <a:ea typeface="Lora" pitchFamily="34" charset="-122"/>
+                <a:cs typeface="Lora" pitchFamily="34" charset="-120"/>
+              </a:rPr>
+              <a:t>MTBF 壓力測試機制，驗證系統長時間高負載穩定性</a:t>
+            </a:r>
+            <a:endParaRPr lang="en-US" sz="1750" dirty="0"/>
+          </a:p>
+        </p:txBody>
+      </p:sp>
+      <p:sp>
+        <p:nvSpPr>
+          <p:cNvPr id="18" name="Shape 13"/>
+          <p:cNvSpPr/>
+          <p:nvPr/>
+        </p:nvSpPr>
+        <p:spPr>
+          <a:xfrm>
+            <a:off x="7428548" y="4990862"/>
+            <a:ext cx="6408063" cy="2214205"/>
+          </a:xfrm>
+          <a:prstGeom prst="roundRect">
+            <a:avLst>
+              <a:gd name="adj" fmla="val 1537"/>
+            </a:avLst>
+          </a:prstGeom>
+          <a:solidFill>
+            <a:srgbClr val="F0EDE6"/>
+          </a:solidFill>
+          <a:ln/>
+        </p:spPr>
+      </p:sp>
+      <p:sp>
+        <p:nvSpPr>
+          <p:cNvPr id="19" name="Shape 14"/>
+          <p:cNvSpPr/>
+          <p:nvPr/>
+        </p:nvSpPr>
+        <p:spPr>
+          <a:xfrm>
+            <a:off x="7655362" y="5217676"/>
+            <a:ext cx="680442" cy="680442"/>
+          </a:xfrm>
+          <a:prstGeom prst="roundRect">
+            <a:avLst>
+              <a:gd name="adj" fmla="val 13436980"/>
+            </a:avLst>
+          </a:prstGeom>
+          <a:solidFill>
+            <a:srgbClr val="1B5F39"/>
+          </a:solidFill>
+          <a:ln/>
+        </p:spPr>
+      </p:sp>
+      <p:pic>
+        <p:nvPicPr>
+          <p:cNvPr id="20" name="Image 3" descr="preencoded.png"/>
+          <p:cNvPicPr>
+            <a:picLocks noChangeAspect="1"/>
+          </p:cNvPicPr>
+          <p:nvPr/>
+        </p:nvPicPr>
+        <p:blipFill>
+          <a:blip r:embed="rId9">
+            <a:extLst>
+              <a:ext uri="{96DAC541-7B7A-43D3-8B79-37D633B846F1}">
+                <asvg:svgBlip xmlns:asvg="http://schemas.microsoft.com/office/drawing/2016/SVG/main" r:embed="rId10"/>
+              </a:ext>
+            </a:extLst>
+          </a:blip>
+          <a:stretch>
+            <a:fillRect/>
+          </a:stretch>
+        </p:blipFill>
+        <p:spPr>
+          <a:xfrm>
+            <a:off x="7842528" y="5404723"/>
+            <a:ext cx="306110" cy="306110"/>
+          </a:xfrm>
+          <a:prstGeom prst="rect">
+            <a:avLst/>
+          </a:prstGeom>
+        </p:spPr>
+      </p:pic>
+      <p:sp>
+        <p:nvSpPr>
+          <p:cNvPr id="21" name="Text 15"/>
+          <p:cNvSpPr/>
+          <p:nvPr/>
+        </p:nvSpPr>
+        <p:spPr>
+          <a:xfrm>
+            <a:off x="7655362" y="6124932"/>
+            <a:ext cx="2835235" cy="354330"/>
+          </a:xfrm>
+          <a:prstGeom prst="rect">
+            <a:avLst/>
+          </a:prstGeom>
+          <a:noFill/>
+          <a:ln/>
+        </p:spPr>
+        <p:txBody>
+          <a:bodyPr wrap="none" lIns="0" tIns="0" rIns="0" bIns="0" rtlCol="0" anchor="t"/>
+          <a:lstStyle/>
+          <a:p>
+            <a:pPr marL="0" indent="0" algn="l">
+              <a:lnSpc>
+                <a:spcPts val="2750"/>
+              </a:lnSpc>
+              <a:buNone/>
+            </a:pPr>
+            <a:r>
+              <a:rPr lang="en-US" sz="2200" dirty="0">
+                <a:solidFill>
+                  <a:srgbClr val="2C2821"/>
+                </a:solidFill>
+                <a:latin typeface="Alice" pitchFamily="34" charset="0"/>
+                <a:ea typeface="Alice" pitchFamily="34" charset="-122"/>
+                <a:cs typeface="Alice" pitchFamily="34" charset="-120"/>
+              </a:rPr>
               <a:t>版本追蹤機制</a:t>
             </a:r>
             <a:endParaRPr lang="en-US" sz="2200" dirty="0"/>
@@ -7982,7 +7805,7 @@
           <a:bodyPr wrap="none" lIns="0" tIns="0" rIns="0" bIns="0" rtlCol="0" anchor="t"/>
           <a:lstStyle/>
           <a:p>
-            <a:pPr algn="l" indent="0" marL="0">
+            <a:pPr marL="0" indent="0" algn="l">
               <a:lnSpc>
                 <a:spcPts val="2850"/>
               </a:lnSpc>
@@ -8030,181 +7853,7 @@
       </p:grpSpPr>
       <p:pic>
         <p:nvPicPr>
-          <p:cNvPr id="2" name="Image 0" descr="preencoded.png">    </p:cNvPr>
-          <p:cNvPicPr>
-            <a:picLocks noChangeAspect="1"/>
-          </p:cNvPicPr>
-          <p:nvPr/>
-        </p:nvPicPr>
-        <p:blipFill>
-          <a:blip r:embed="rId1"/>
-          <a:stretch>
-            <a:fillRect/>
-          </a:stretch>
-        </p:blipFill>
-        <p:spPr>
-          <a:xfrm>
-            <a:off x="0" y="0"/>
-            <a:ext cx="5486400" cy="8229600"/>
-          </a:xfrm>
-          <a:prstGeom prst="rect">
-            <a:avLst/>
-          </a:prstGeom>
-        </p:spPr>
-      </p:pic>
-      <p:sp>
-        <p:nvSpPr>
-          <p:cNvPr id="3" name="Text 0"/>
-          <p:cNvSpPr/>
-          <p:nvPr/>
-        </p:nvSpPr>
-        <p:spPr>
-          <a:xfrm>
-            <a:off x="6280190" y="1549003"/>
-            <a:ext cx="5670590" cy="708779"/>
-          </a:xfrm>
-          <a:prstGeom prst="rect">
-            <a:avLst/>
-          </a:prstGeom>
-          <a:noFill/>
-          <a:ln/>
-        </p:spPr>
-        <p:txBody>
-          <a:bodyPr wrap="none" lIns="0" tIns="0" rIns="0" bIns="0" rtlCol="0" anchor="t"/>
-          <a:lstStyle/>
-          <a:p>
-            <a:pPr algn="l" indent="0" marL="0">
-              <a:lnSpc>
-                <a:spcPts val="5550"/>
-              </a:lnSpc>
-              <a:buNone/>
-            </a:pPr>
-            <a:r>
-              <a:rPr lang="en-US" sz="4450" dirty="0">
-                <a:solidFill>
-                  <a:srgbClr val="233E32"/>
-                </a:solidFill>
-                <a:latin typeface="Alice" pitchFamily="34" charset="0"/>
-                <a:ea typeface="Alice" pitchFamily="34" charset="-122"/>
-                <a:cs typeface="Alice" pitchFamily="34" charset="-120"/>
-              </a:rPr>
-              <a:t>三階段驗證流程架構</a:t>
-            </a:r>
-            <a:endParaRPr lang="en-US" sz="4450" dirty="0"/>
-          </a:p>
-        </p:txBody>
-      </p:sp>
-      <p:pic>
-        <p:nvPicPr>
-          <p:cNvPr id="4" name="Image 1" descr="preencoded.png">    </p:cNvPr>
-          <p:cNvPicPr>
-            <a:picLocks noChangeAspect="1"/>
-          </p:cNvPicPr>
-          <p:nvPr/>
-        </p:nvPicPr>
-        <p:blipFill>
-          <a:blip r:embed="rId2"/>
-          <a:stretch>
-            <a:fillRect/>
-          </a:stretch>
-        </p:blipFill>
-        <p:spPr>
-          <a:xfrm>
-            <a:off x="6280190" y="2597944"/>
-            <a:ext cx="1134070" cy="1360884"/>
-          </a:xfrm>
-          <a:prstGeom prst="rect">
-            <a:avLst/>
-          </a:prstGeom>
-        </p:spPr>
-      </p:pic>
-      <p:sp>
-        <p:nvSpPr>
-          <p:cNvPr id="5" name="Text 1"/>
-          <p:cNvSpPr/>
-          <p:nvPr/>
-        </p:nvSpPr>
-        <p:spPr>
-          <a:xfrm>
-            <a:off x="7641074" y="2824758"/>
-            <a:ext cx="2835235" cy="354330"/>
-          </a:xfrm>
-          <a:prstGeom prst="rect">
-            <a:avLst/>
-          </a:prstGeom>
-          <a:noFill/>
-          <a:ln/>
-        </p:spPr>
-        <p:txBody>
-          <a:bodyPr wrap="none" lIns="0" tIns="0" rIns="0" bIns="0" rtlCol="0" anchor="t"/>
-          <a:lstStyle/>
-          <a:p>
-            <a:pPr algn="l" indent="0" marL="0">
-              <a:lnSpc>
-                <a:spcPts val="2750"/>
-              </a:lnSpc>
-              <a:buNone/>
-            </a:pPr>
-            <a:r>
-              <a:rPr lang="en-US" sz="2200" dirty="0">
-                <a:solidFill>
-                  <a:srgbClr val="2C2821"/>
-                </a:solidFill>
-                <a:latin typeface="Alice" pitchFamily="34" charset="0"/>
-                <a:ea typeface="Alice" pitchFamily="34" charset="-122"/>
-                <a:cs typeface="Alice" pitchFamily="34" charset="-120"/>
-              </a:rPr>
-              <a:t>CI-1: 快速驗證</a:t>
-            </a:r>
-            <a:endParaRPr lang="en-US" sz="2200" dirty="0"/>
-          </a:p>
-        </p:txBody>
-      </p:sp>
-      <p:sp>
-        <p:nvSpPr>
-          <p:cNvPr id="6" name="Text 2"/>
-          <p:cNvSpPr/>
-          <p:nvPr/>
-        </p:nvSpPr>
-        <p:spPr>
-          <a:xfrm>
-            <a:off x="7641074" y="3315176"/>
-            <a:ext cx="6195536" cy="362903"/>
-          </a:xfrm>
-          <a:prstGeom prst="rect">
-            <a:avLst/>
-          </a:prstGeom>
-          <a:noFill/>
-          <a:ln/>
-        </p:spPr>
-        <p:txBody>
-          <a:bodyPr wrap="none" lIns="0" tIns="0" rIns="0" bIns="0" rtlCol="0" anchor="t"/>
-          <a:lstStyle/>
-          <a:p>
-            <a:pPr algn="l" indent="0" marL="0">
-              <a:lnSpc>
-                <a:spcPts val="2850"/>
-              </a:lnSpc>
-              <a:buNone/>
-            </a:pPr>
-            <a:r>
-              <a:rPr lang="en-US" sz="1750" dirty="0">
-                <a:solidFill>
-                  <a:srgbClr val="2C2821"/>
-                </a:solidFill>
-                <a:latin typeface="Lora" pitchFamily="34" charset="0"/>
-                <a:ea typeface="Lora" pitchFamily="34" charset="-122"/>
-                <a:cs typeface="Lora" pitchFamily="34" charset="-120"/>
-              </a:rPr>
-              <a:t>15-30 分鐘快速檢查，RD 提交前的第一道防線</a:t>
-            </a:r>
-            <a:endParaRPr lang="en-US" sz="1750" dirty="0"/>
-          </a:p>
-        </p:txBody>
-      </p:sp>
-      <p:pic>
-        <p:nvPicPr>
-          <p:cNvPr id="7" name="Image 2" descr="preencoded.png">    </p:cNvPr>
+          <p:cNvPr id="2" name="Image 0" descr="preencoded.png"/>
           <p:cNvPicPr>
             <a:picLocks noChangeAspect="1"/>
           </p:cNvPicPr>
@@ -8218,8 +7867,8 @@
         </p:blipFill>
         <p:spPr>
           <a:xfrm>
-            <a:off x="6280190" y="3958828"/>
-            <a:ext cx="1134070" cy="1360884"/>
+            <a:off x="0" y="0"/>
+            <a:ext cx="5486400" cy="8229600"/>
           </a:xfrm>
           <a:prstGeom prst="rect">
             <a:avLst/>
@@ -8228,91 +7877,49 @@
       </p:pic>
       <p:sp>
         <p:nvSpPr>
-          <p:cNvPr id="8" name="Text 3"/>
-          <p:cNvSpPr/>
-          <p:nvPr/>
-        </p:nvSpPr>
-        <p:spPr>
-          <a:xfrm>
-            <a:off x="7641074" y="4185642"/>
-            <a:ext cx="2835235" cy="354330"/>
-          </a:xfrm>
-          <a:prstGeom prst="rect">
-            <a:avLst/>
-          </a:prstGeom>
-          <a:noFill/>
-          <a:ln/>
-        </p:spPr>
-        <p:txBody>
-          <a:bodyPr wrap="none" lIns="0" tIns="0" rIns="0" bIns="0" rtlCol="0" anchor="t"/>
-          <a:lstStyle/>
-          <a:p>
-            <a:pPr algn="l" indent="0" marL="0">
-              <a:lnSpc>
-                <a:spcPts val="2750"/>
-              </a:lnSpc>
-              <a:buNone/>
-            </a:pPr>
-            <a:r>
-              <a:rPr lang="en-US" sz="2200" dirty="0">
-                <a:solidFill>
-                  <a:srgbClr val="2C2821"/>
+          <p:cNvPr id="3" name="Text 0"/>
+          <p:cNvSpPr/>
+          <p:nvPr/>
+        </p:nvSpPr>
+        <p:spPr>
+          <a:xfrm>
+            <a:off x="6280190" y="1549003"/>
+            <a:ext cx="5670590" cy="708779"/>
+          </a:xfrm>
+          <a:prstGeom prst="rect">
+            <a:avLst/>
+          </a:prstGeom>
+          <a:noFill/>
+          <a:ln/>
+        </p:spPr>
+        <p:txBody>
+          <a:bodyPr wrap="none" lIns="0" tIns="0" rIns="0" bIns="0" rtlCol="0" anchor="t"/>
+          <a:lstStyle/>
+          <a:p>
+            <a:pPr marL="0" indent="0" algn="l">
+              <a:lnSpc>
+                <a:spcPts val="5550"/>
+              </a:lnSpc>
+              <a:buNone/>
+            </a:pPr>
+            <a:r>
+              <a:rPr lang="en-US" sz="4450" dirty="0">
+                <a:solidFill>
+                  <a:srgbClr val="233E32"/>
                 </a:solidFill>
                 <a:latin typeface="Alice" pitchFamily="34" charset="0"/>
                 <a:ea typeface="Alice" pitchFamily="34" charset="-122"/>
                 <a:cs typeface="Alice" pitchFamily="34" charset="-120"/>
               </a:rPr>
-              <a:t>CI-MTBF: 壓力測試</a:t>
-            </a:r>
-            <a:endParaRPr lang="en-US" sz="2200" dirty="0"/>
-          </a:p>
-        </p:txBody>
-      </p:sp>
-      <p:sp>
-        <p:nvSpPr>
-          <p:cNvPr id="9" name="Text 4"/>
-          <p:cNvSpPr/>
-          <p:nvPr/>
-        </p:nvSpPr>
-        <p:spPr>
-          <a:xfrm>
-            <a:off x="7641074" y="4676061"/>
-            <a:ext cx="6195536" cy="362903"/>
-          </a:xfrm>
-          <a:prstGeom prst="rect">
-            <a:avLst/>
-          </a:prstGeom>
-          <a:noFill/>
-          <a:ln/>
-        </p:spPr>
-        <p:txBody>
-          <a:bodyPr wrap="none" lIns="0" tIns="0" rIns="0" bIns="0" rtlCol="0" anchor="t"/>
-          <a:lstStyle/>
-          <a:p>
-            <a:pPr algn="l" indent="0" marL="0">
-              <a:lnSpc>
-                <a:spcPts val="2850"/>
-              </a:lnSpc>
-              <a:buNone/>
-            </a:pPr>
-            <a:r>
-              <a:rPr lang="en-US" sz="1750" dirty="0">
-                <a:solidFill>
-                  <a:srgbClr val="2C2821"/>
-                </a:solidFill>
-                <a:latin typeface="Lora" pitchFamily="34" charset="0"/>
-                <a:ea typeface="Lora" pitchFamily="34" charset="-122"/>
-                <a:cs typeface="Lora" pitchFamily="34" charset="-120"/>
-              </a:rPr>
-              <a:t>50-100 輪穩定性測試，確保長時間運行無虞</a:t>
-            </a:r>
-            <a:endParaRPr lang="en-US" sz="1750" dirty="0"/>
+              <a:t>三階段驗證流程架構</a:t>
+            </a:r>
+            <a:endParaRPr lang="en-US" sz="4450" dirty="0"/>
           </a:p>
         </p:txBody>
       </p:sp>
       <p:pic>
         <p:nvPicPr>
-          <p:cNvPr id="10" name="Image 3" descr="preencoded.png">    </p:cNvPr>
+          <p:cNvPr id="4" name="Image 1" descr="preencoded.png"/>
           <p:cNvPicPr>
             <a:picLocks noChangeAspect="1"/>
           </p:cNvPicPr>
@@ -8326,7 +7933,7 @@
         </p:blipFill>
         <p:spPr>
           <a:xfrm>
-            <a:off x="6280190" y="5319713"/>
+            <a:off x="6280190" y="2597944"/>
             <a:ext cx="1134070" cy="1360884"/>
           </a:xfrm>
           <a:prstGeom prst="rect">
@@ -8336,13 +7943,13 @@
       </p:pic>
       <p:sp>
         <p:nvSpPr>
-          <p:cNvPr id="11" name="Text 5"/>
-          <p:cNvSpPr/>
-          <p:nvPr/>
-        </p:nvSpPr>
-        <p:spPr>
-          <a:xfrm>
-            <a:off x="7641074" y="5546527"/>
+          <p:cNvPr id="5" name="Text 1"/>
+          <p:cNvSpPr/>
+          <p:nvPr/>
+        </p:nvSpPr>
+        <p:spPr>
+          <a:xfrm>
+            <a:off x="7641074" y="2824758"/>
             <a:ext cx="2835235" cy="354330"/>
           </a:xfrm>
           <a:prstGeom prst="rect">
@@ -8355,7 +7962,7 @@
           <a:bodyPr wrap="none" lIns="0" tIns="0" rIns="0" bIns="0" rtlCol="0" anchor="t"/>
           <a:lstStyle/>
           <a:p>
-            <a:pPr algn="l" indent="0" marL="0">
+            <a:pPr marL="0" indent="0" algn="l">
               <a:lnSpc>
                 <a:spcPts val="2750"/>
               </a:lnSpc>
@@ -8370,6 +7977,222 @@
                 <a:ea typeface="Alice" pitchFamily="34" charset="-122"/>
                 <a:cs typeface="Alice" pitchFamily="34" charset="-120"/>
               </a:rPr>
+              <a:t>CI-1: 快速驗證</a:t>
+            </a:r>
+            <a:endParaRPr lang="en-US" sz="2200" dirty="0"/>
+          </a:p>
+        </p:txBody>
+      </p:sp>
+      <p:sp>
+        <p:nvSpPr>
+          <p:cNvPr id="6" name="Text 2"/>
+          <p:cNvSpPr/>
+          <p:nvPr/>
+        </p:nvSpPr>
+        <p:spPr>
+          <a:xfrm>
+            <a:off x="7641074" y="3315176"/>
+            <a:ext cx="6195536" cy="362903"/>
+          </a:xfrm>
+          <a:prstGeom prst="rect">
+            <a:avLst/>
+          </a:prstGeom>
+          <a:noFill/>
+          <a:ln/>
+        </p:spPr>
+        <p:txBody>
+          <a:bodyPr wrap="none" lIns="0" tIns="0" rIns="0" bIns="0" rtlCol="0" anchor="t"/>
+          <a:lstStyle/>
+          <a:p>
+            <a:pPr marL="0" indent="0" algn="l">
+              <a:lnSpc>
+                <a:spcPts val="2850"/>
+              </a:lnSpc>
+              <a:buNone/>
+            </a:pPr>
+            <a:r>
+              <a:rPr lang="en-US" sz="1750" dirty="0">
+                <a:solidFill>
+                  <a:srgbClr val="2C2821"/>
+                </a:solidFill>
+                <a:latin typeface="Lora" pitchFamily="34" charset="0"/>
+                <a:ea typeface="Lora" pitchFamily="34" charset="-122"/>
+                <a:cs typeface="Lora" pitchFamily="34" charset="-120"/>
+              </a:rPr>
+              <a:t>15-30 分鐘快速檢查，RD 提交前的第一道防線</a:t>
+            </a:r>
+            <a:endParaRPr lang="en-US" sz="1750" dirty="0"/>
+          </a:p>
+        </p:txBody>
+      </p:sp>
+      <p:pic>
+        <p:nvPicPr>
+          <p:cNvPr id="7" name="Image 2" descr="preencoded.png"/>
+          <p:cNvPicPr>
+            <a:picLocks noChangeAspect="1"/>
+          </p:cNvPicPr>
+          <p:nvPr/>
+        </p:nvPicPr>
+        <p:blipFill>
+          <a:blip r:embed="rId5"/>
+          <a:stretch>
+            <a:fillRect/>
+          </a:stretch>
+        </p:blipFill>
+        <p:spPr>
+          <a:xfrm>
+            <a:off x="6280190" y="3958828"/>
+            <a:ext cx="1134070" cy="1360884"/>
+          </a:xfrm>
+          <a:prstGeom prst="rect">
+            <a:avLst/>
+          </a:prstGeom>
+        </p:spPr>
+      </p:pic>
+      <p:sp>
+        <p:nvSpPr>
+          <p:cNvPr id="8" name="Text 3"/>
+          <p:cNvSpPr/>
+          <p:nvPr/>
+        </p:nvSpPr>
+        <p:spPr>
+          <a:xfrm>
+            <a:off x="7641074" y="4185642"/>
+            <a:ext cx="2835235" cy="354330"/>
+          </a:xfrm>
+          <a:prstGeom prst="rect">
+            <a:avLst/>
+          </a:prstGeom>
+          <a:noFill/>
+          <a:ln/>
+        </p:spPr>
+        <p:txBody>
+          <a:bodyPr wrap="none" lIns="0" tIns="0" rIns="0" bIns="0" rtlCol="0" anchor="t"/>
+          <a:lstStyle/>
+          <a:p>
+            <a:pPr marL="0" indent="0" algn="l">
+              <a:lnSpc>
+                <a:spcPts val="2750"/>
+              </a:lnSpc>
+              <a:buNone/>
+            </a:pPr>
+            <a:r>
+              <a:rPr lang="en-US" sz="2200" dirty="0">
+                <a:solidFill>
+                  <a:srgbClr val="2C2821"/>
+                </a:solidFill>
+                <a:latin typeface="Alice" pitchFamily="34" charset="0"/>
+                <a:ea typeface="Alice" pitchFamily="34" charset="-122"/>
+                <a:cs typeface="Alice" pitchFamily="34" charset="-120"/>
+              </a:rPr>
+              <a:t>CI-MTBF: 壓力測試</a:t>
+            </a:r>
+            <a:endParaRPr lang="en-US" sz="2200" dirty="0"/>
+          </a:p>
+        </p:txBody>
+      </p:sp>
+      <p:sp>
+        <p:nvSpPr>
+          <p:cNvPr id="9" name="Text 4"/>
+          <p:cNvSpPr/>
+          <p:nvPr/>
+        </p:nvSpPr>
+        <p:spPr>
+          <a:xfrm>
+            <a:off x="7641074" y="4676061"/>
+            <a:ext cx="6195536" cy="362903"/>
+          </a:xfrm>
+          <a:prstGeom prst="rect">
+            <a:avLst/>
+          </a:prstGeom>
+          <a:noFill/>
+          <a:ln/>
+        </p:spPr>
+        <p:txBody>
+          <a:bodyPr wrap="none" lIns="0" tIns="0" rIns="0" bIns="0" rtlCol="0" anchor="t"/>
+          <a:lstStyle/>
+          <a:p>
+            <a:pPr marL="0" indent="0" algn="l">
+              <a:lnSpc>
+                <a:spcPts val="2850"/>
+              </a:lnSpc>
+              <a:buNone/>
+            </a:pPr>
+            <a:r>
+              <a:rPr lang="en-US" sz="1750" dirty="0">
+                <a:solidFill>
+                  <a:srgbClr val="2C2821"/>
+                </a:solidFill>
+                <a:latin typeface="Lora" pitchFamily="34" charset="0"/>
+                <a:ea typeface="Lora" pitchFamily="34" charset="-122"/>
+                <a:cs typeface="Lora" pitchFamily="34" charset="-120"/>
+              </a:rPr>
+              <a:t>50-100 輪穩定性測試，確保長時間運行無虞</a:t>
+            </a:r>
+            <a:endParaRPr lang="en-US" sz="1750" dirty="0"/>
+          </a:p>
+        </p:txBody>
+      </p:sp>
+      <p:pic>
+        <p:nvPicPr>
+          <p:cNvPr id="10" name="Image 3" descr="preencoded.png"/>
+          <p:cNvPicPr>
+            <a:picLocks noChangeAspect="1"/>
+          </p:cNvPicPr>
+          <p:nvPr/>
+        </p:nvPicPr>
+        <p:blipFill>
+          <a:blip r:embed="rId6"/>
+          <a:stretch>
+            <a:fillRect/>
+          </a:stretch>
+        </p:blipFill>
+        <p:spPr>
+          <a:xfrm>
+            <a:off x="6280190" y="5319713"/>
+            <a:ext cx="1134070" cy="1360884"/>
+          </a:xfrm>
+          <a:prstGeom prst="rect">
+            <a:avLst/>
+          </a:prstGeom>
+        </p:spPr>
+      </p:pic>
+      <p:sp>
+        <p:nvSpPr>
+          <p:cNvPr id="11" name="Text 5"/>
+          <p:cNvSpPr/>
+          <p:nvPr/>
+        </p:nvSpPr>
+        <p:spPr>
+          <a:xfrm>
+            <a:off x="7641074" y="5546527"/>
+            <a:ext cx="2835235" cy="354330"/>
+          </a:xfrm>
+          <a:prstGeom prst="rect">
+            <a:avLst/>
+          </a:prstGeom>
+          <a:noFill/>
+          <a:ln/>
+        </p:spPr>
+        <p:txBody>
+          <a:bodyPr wrap="none" lIns="0" tIns="0" rIns="0" bIns="0" rtlCol="0" anchor="t"/>
+          <a:lstStyle/>
+          <a:p>
+            <a:pPr marL="0" indent="0" algn="l">
+              <a:lnSpc>
+                <a:spcPts val="2750"/>
+              </a:lnSpc>
+              <a:buNone/>
+            </a:pPr>
+            <a:r>
+              <a:rPr lang="en-US" sz="2200" dirty="0">
+                <a:solidFill>
+                  <a:srgbClr val="2C2821"/>
+                </a:solidFill>
+                <a:latin typeface="Alice" pitchFamily="34" charset="0"/>
+                <a:ea typeface="Alice" pitchFamily="34" charset="-122"/>
+                <a:cs typeface="Alice" pitchFamily="34" charset="-120"/>
+              </a:rPr>
               <a:t>CI-0: 全面回歸</a:t>
             </a:r>
             <a:endParaRPr lang="en-US" sz="2200" dirty="0"/>
@@ -8397,7 +8220,7 @@
           <a:bodyPr wrap="none" lIns="0" tIns="0" rIns="0" bIns="0" rtlCol="0" anchor="t"/>
           <a:lstStyle/>
           <a:p>
-            <a:pPr algn="l" indent="0" marL="0">
+            <a:pPr marL="0" indent="0" algn="l">
               <a:lnSpc>
                 <a:spcPts val="2850"/>
               </a:lnSpc>
@@ -8464,7 +8287,7 @@
           <a:bodyPr wrap="none" lIns="0" tIns="0" rIns="0" bIns="0" rtlCol="0" anchor="t"/>
           <a:lstStyle/>
           <a:p>
-            <a:pPr algn="l" indent="0" marL="0">
+            <a:pPr marL="0" indent="0" algn="l">
               <a:lnSpc>
                 <a:spcPts val="4600"/>
               </a:lnSpc>
@@ -8506,7 +8329,7 @@
           <a:bodyPr wrap="none" lIns="0" tIns="0" rIns="0" bIns="0" rtlCol="0" anchor="t"/>
           <a:lstStyle/>
           <a:p>
-            <a:pPr algn="l" indent="0" marL="0">
+            <a:pPr marL="0" indent="0" algn="l">
               <a:lnSpc>
                 <a:spcPts val="2300"/>
               </a:lnSpc>
@@ -8548,7 +8371,7 @@
           <a:bodyPr wrap="square" lIns="0" tIns="0" rIns="0" bIns="0" rtlCol="0" anchor="t"/>
           <a:lstStyle/>
           <a:p>
-            <a:pPr algn="l" indent="0" marL="0">
+            <a:pPr marL="0" indent="0" algn="l">
               <a:lnSpc>
                 <a:spcPts val="2350"/>
               </a:lnSpc>
@@ -8590,7 +8413,7 @@
           <a:bodyPr wrap="none" lIns="0" tIns="0" rIns="0" bIns="0" rtlCol="0" anchor="t"/>
           <a:lstStyle/>
           <a:p>
-            <a:pPr algn="l" indent="0" marL="0">
+            <a:pPr marL="0" indent="0" algn="l">
               <a:lnSpc>
                 <a:spcPts val="2300"/>
               </a:lnSpc>
@@ -8632,7 +8455,7 @@
           <a:bodyPr wrap="none" lIns="0" tIns="0" rIns="0" bIns="0" rtlCol="0" anchor="t"/>
           <a:lstStyle/>
           <a:p>
-            <a:pPr algn="l" marL="342900" indent="-342900">
+            <a:pPr marL="342900" indent="-342900" algn="l">
               <a:lnSpc>
                 <a:spcPts val="2350"/>
               </a:lnSpc>
@@ -8675,7 +8498,7 @@
           <a:bodyPr wrap="none" lIns="0" tIns="0" rIns="0" bIns="0" rtlCol="0" anchor="t"/>
           <a:lstStyle/>
           <a:p>
-            <a:pPr algn="l" marL="342900" indent="-342900">
+            <a:pPr marL="342900" indent="-342900" algn="l">
               <a:lnSpc>
                 <a:spcPts val="2350"/>
               </a:lnSpc>
@@ -8718,7 +8541,7 @@
           <a:bodyPr wrap="none" lIns="0" tIns="0" rIns="0" bIns="0" rtlCol="0" anchor="t"/>
           <a:lstStyle/>
           <a:p>
-            <a:pPr algn="l" marL="342900" indent="-342900">
+            <a:pPr marL="342900" indent="-342900" algn="l">
               <a:lnSpc>
                 <a:spcPts val="2350"/>
               </a:lnSpc>
@@ -8761,7 +8584,7 @@
           <a:bodyPr wrap="none" lIns="0" tIns="0" rIns="0" bIns="0" rtlCol="0" anchor="t"/>
           <a:lstStyle/>
           <a:p>
-            <a:pPr algn="l" marL="342900" indent="-342900">
+            <a:pPr marL="342900" indent="-342900" algn="l">
               <a:lnSpc>
                 <a:spcPts val="2350"/>
               </a:lnSpc>
@@ -8804,7 +8627,7 @@
           <a:bodyPr wrap="none" lIns="0" tIns="0" rIns="0" bIns="0" rtlCol="0" anchor="t"/>
           <a:lstStyle/>
           <a:p>
-            <a:pPr algn="ctr" indent="0" marL="0">
+            <a:pPr marL="0" indent="0" algn="ctr">
               <a:lnSpc>
                 <a:spcPts val="4850"/>
               </a:lnSpc>
@@ -8846,7 +8669,7 @@
           <a:bodyPr wrap="none" lIns="0" tIns="0" rIns="0" bIns="0" rtlCol="0" anchor="t"/>
           <a:lstStyle/>
           <a:p>
-            <a:pPr algn="ctr" indent="0" marL="0">
+            <a:pPr marL="0" indent="0" algn="ctr">
               <a:lnSpc>
                 <a:spcPts val="2300"/>
               </a:lnSpc>
@@ -8888,7 +8711,7 @@
           <a:bodyPr wrap="none" lIns="0" tIns="0" rIns="0" bIns="0" rtlCol="0" anchor="t"/>
           <a:lstStyle/>
           <a:p>
-            <a:pPr algn="ctr" indent="0" marL="0">
+            <a:pPr marL="0" indent="0" algn="ctr">
               <a:lnSpc>
                 <a:spcPts val="2350"/>
               </a:lnSpc>
@@ -8930,7 +8753,7 @@
           <a:bodyPr wrap="none" lIns="0" tIns="0" rIns="0" bIns="0" rtlCol="0" anchor="t"/>
           <a:lstStyle/>
           <a:p>
-            <a:pPr algn="ctr" indent="0" marL="0">
+            <a:pPr marL="0" indent="0" algn="ctr">
               <a:lnSpc>
                 <a:spcPts val="4850"/>
               </a:lnSpc>
@@ -8972,7 +8795,7 @@
           <a:bodyPr wrap="none" lIns="0" tIns="0" rIns="0" bIns="0" rtlCol="0" anchor="t"/>
           <a:lstStyle/>
           <a:p>
-            <a:pPr algn="ctr" indent="0" marL="0">
+            <a:pPr marL="0" indent="0" algn="ctr">
               <a:lnSpc>
                 <a:spcPts val="2300"/>
               </a:lnSpc>
@@ -9014,7 +8837,7 @@
           <a:bodyPr wrap="none" lIns="0" tIns="0" rIns="0" bIns="0" rtlCol="0" anchor="t"/>
           <a:lstStyle/>
           <a:p>
-            <a:pPr algn="ctr" indent="0" marL="0">
+            <a:pPr marL="0" indent="0" algn="ctr">
               <a:lnSpc>
                 <a:spcPts val="2350"/>
               </a:lnSpc>
@@ -9056,7 +8879,7 @@
           <a:bodyPr wrap="none" lIns="0" tIns="0" rIns="0" bIns="0" rtlCol="0" anchor="t"/>
           <a:lstStyle/>
           <a:p>
-            <a:pPr algn="ctr" indent="0" marL="0">
+            <a:pPr marL="0" indent="0" algn="ctr">
               <a:lnSpc>
                 <a:spcPts val="4850"/>
               </a:lnSpc>
@@ -9098,7 +8921,7 @@
           <a:bodyPr wrap="none" lIns="0" tIns="0" rIns="0" bIns="0" rtlCol="0" anchor="t"/>
           <a:lstStyle/>
           <a:p>
-            <a:pPr algn="ctr" indent="0" marL="0">
+            <a:pPr marL="0" indent="0" algn="ctr">
               <a:lnSpc>
                 <a:spcPts val="2300"/>
               </a:lnSpc>
@@ -9140,7 +8963,7 @@
           <a:bodyPr wrap="none" lIns="0" tIns="0" rIns="0" bIns="0" rtlCol="0" anchor="t"/>
           <a:lstStyle/>
           <a:p>
-            <a:pPr algn="ctr" indent="0" marL="0">
+            <a:pPr marL="0" indent="0" algn="ctr">
               <a:lnSpc>
                 <a:spcPts val="2350"/>
               </a:lnSpc>
@@ -9207,7 +9030,7 @@
           <a:bodyPr wrap="none" lIns="0" tIns="0" rIns="0" bIns="0" rtlCol="0" anchor="t"/>
           <a:lstStyle/>
           <a:p>
-            <a:pPr algn="l" indent="0" marL="0">
+            <a:pPr marL="0" indent="0" algn="l">
               <a:lnSpc>
                 <a:spcPts val="5550"/>
               </a:lnSpc>
@@ -9249,7 +9072,7 @@
           <a:bodyPr wrap="none" lIns="0" tIns="0" rIns="0" bIns="0" rtlCol="0" anchor="t"/>
           <a:lstStyle/>
           <a:p>
-            <a:pPr algn="l" indent="0" marL="0">
+            <a:pPr marL="0" indent="0" algn="l">
               <a:lnSpc>
                 <a:spcPts val="2850"/>
               </a:lnSpc>
@@ -9311,7 +9134,7 @@
           <a:bodyPr wrap="none" lIns="0" tIns="0" rIns="0" bIns="0" rtlCol="0" anchor="t"/>
           <a:lstStyle/>
           <a:p>
-            <a:pPr algn="l" indent="0" marL="0">
+            <a:pPr marL="0" indent="0" algn="l">
               <a:lnSpc>
                 <a:spcPts val="2750"/>
               </a:lnSpc>
@@ -9353,7 +9176,7 @@
           <a:bodyPr wrap="square" lIns="0" tIns="0" rIns="0" bIns="0" rtlCol="0" anchor="t"/>
           <a:lstStyle/>
           <a:p>
-            <a:pPr algn="l" indent="0" marL="0">
+            <a:pPr marL="0" indent="0" algn="l">
               <a:lnSpc>
                 <a:spcPts val="2850"/>
               </a:lnSpc>
@@ -9395,7 +9218,7 @@
           <a:bodyPr wrap="none" lIns="0" tIns="0" rIns="0" bIns="0" rtlCol="0" anchor="t"/>
           <a:lstStyle/>
           <a:p>
-            <a:pPr algn="l" indent="0" marL="0">
+            <a:pPr marL="0" indent="0" algn="l">
               <a:lnSpc>
                 <a:spcPts val="2850"/>
               </a:lnSpc>
@@ -9457,7 +9280,7 @@
           <a:bodyPr wrap="none" lIns="0" tIns="0" rIns="0" bIns="0" rtlCol="0" anchor="t"/>
           <a:lstStyle/>
           <a:p>
-            <a:pPr algn="l" indent="0" marL="0">
+            <a:pPr marL="0" indent="0" algn="l">
               <a:lnSpc>
                 <a:spcPts val="2750"/>
               </a:lnSpc>
@@ -9499,7 +9322,7 @@
           <a:bodyPr wrap="none" lIns="0" tIns="0" rIns="0" bIns="0" rtlCol="0" anchor="t"/>
           <a:lstStyle/>
           <a:p>
-            <a:pPr algn="l" indent="0" marL="0">
+            <a:pPr marL="0" indent="0" algn="l">
               <a:lnSpc>
                 <a:spcPts val="2850"/>
               </a:lnSpc>
@@ -9541,7 +9364,7 @@
           <a:bodyPr wrap="none" lIns="0" tIns="0" rIns="0" bIns="0" rtlCol="0" anchor="t"/>
           <a:lstStyle/>
           <a:p>
-            <a:pPr algn="l" indent="0" marL="0">
+            <a:pPr marL="0" indent="0" algn="l">
               <a:lnSpc>
                 <a:spcPts val="2850"/>
               </a:lnSpc>
@@ -9603,7 +9426,7 @@
           <a:bodyPr wrap="none" lIns="0" tIns="0" rIns="0" bIns="0" rtlCol="0" anchor="t"/>
           <a:lstStyle/>
           <a:p>
-            <a:pPr algn="l" indent="0" marL="0">
+            <a:pPr marL="0" indent="0" algn="l">
               <a:lnSpc>
                 <a:spcPts val="2750"/>
               </a:lnSpc>
@@ -9645,7 +9468,7 @@
           <a:bodyPr wrap="square" lIns="0" tIns="0" rIns="0" bIns="0" rtlCol="0" anchor="t"/>
           <a:lstStyle/>
           <a:p>
-            <a:pPr algn="l" indent="0" marL="0">
+            <a:pPr marL="0" indent="0" algn="l">
               <a:lnSpc>
                 <a:spcPts val="2850"/>
               </a:lnSpc>
@@ -9687,7 +9510,7 @@
           <a:bodyPr wrap="none" lIns="0" tIns="0" rIns="0" bIns="0" rtlCol="0" anchor="t"/>
           <a:lstStyle/>
           <a:p>
-            <a:pPr algn="l" indent="0" marL="0">
+            <a:pPr marL="0" indent="0" algn="l">
               <a:lnSpc>
                 <a:spcPts val="2850"/>
               </a:lnSpc>
@@ -9749,7 +9572,7 @@
           <a:bodyPr wrap="none" lIns="0" tIns="0" rIns="0" bIns="0" rtlCol="0" anchor="t"/>
           <a:lstStyle/>
           <a:p>
-            <a:pPr algn="l" indent="0" marL="0">
+            <a:pPr marL="0" indent="0" algn="l">
               <a:lnSpc>
                 <a:spcPts val="2750"/>
               </a:lnSpc>
@@ -9791,7 +9614,7 @@
           <a:bodyPr wrap="none" lIns="0" tIns="0" rIns="0" bIns="0" rtlCol="0" anchor="t"/>
           <a:lstStyle/>
           <a:p>
-            <a:pPr algn="l" indent="0" marL="0">
+            <a:pPr marL="0" indent="0" algn="l">
               <a:lnSpc>
                 <a:spcPts val="2850"/>
               </a:lnSpc>
@@ -9833,7 +9656,7 @@
           <a:bodyPr wrap="none" lIns="0" tIns="0" rIns="0" bIns="0" rtlCol="0" anchor="t"/>
           <a:lstStyle/>
           <a:p>
-            <a:pPr algn="l" indent="0" marL="0">
+            <a:pPr marL="0" indent="0" algn="l">
               <a:lnSpc>
                 <a:spcPts val="2850"/>
               </a:lnSpc>
@@ -9895,7 +9718,7 @@
           <a:bodyPr wrap="none" lIns="0" tIns="0" rIns="0" bIns="0" rtlCol="0" anchor="t"/>
           <a:lstStyle/>
           <a:p>
-            <a:pPr algn="l" indent="0" marL="0">
+            <a:pPr marL="0" indent="0" algn="l">
               <a:lnSpc>
                 <a:spcPts val="2750"/>
               </a:lnSpc>
@@ -9937,7 +9760,7 @@
           <a:bodyPr wrap="none" lIns="0" tIns="0" rIns="0" bIns="0" rtlCol="0" anchor="t"/>
           <a:lstStyle/>
           <a:p>
-            <a:pPr algn="l" indent="0" marL="0">
+            <a:pPr marL="0" indent="0" algn="l">
               <a:lnSpc>
                 <a:spcPts val="2850"/>
               </a:lnSpc>
@@ -10004,7 +9827,7 @@
           <a:bodyPr wrap="none" lIns="0" tIns="0" rIns="0" bIns="0" rtlCol="0" anchor="t"/>
           <a:lstStyle/>
           <a:p>
-            <a:pPr algn="l" indent="0" marL="0">
+            <a:pPr marL="0" indent="0" algn="l">
               <a:lnSpc>
                 <a:spcPts val="5050"/>
               </a:lnSpc>
@@ -10046,7 +9869,7 @@
           <a:bodyPr wrap="none" lIns="0" tIns="0" rIns="0" bIns="0" rtlCol="0" anchor="t"/>
           <a:lstStyle/>
           <a:p>
-            <a:pPr algn="l" indent="0" marL="0">
+            <a:pPr marL="0" indent="0" algn="l">
               <a:lnSpc>
                 <a:spcPts val="2500"/>
               </a:lnSpc>
@@ -10088,7 +9911,7 @@
           <a:bodyPr wrap="square" lIns="0" tIns="0" rIns="0" bIns="0" rtlCol="0" anchor="t"/>
           <a:lstStyle/>
           <a:p>
-            <a:pPr algn="l" indent="0" marL="0">
+            <a:pPr marL="0" indent="0" algn="l">
               <a:lnSpc>
                 <a:spcPts val="2550"/>
               </a:lnSpc>
@@ -10130,7 +9953,7 @@
           <a:bodyPr wrap="none" lIns="0" tIns="0" rIns="0" bIns="0" rtlCol="0" anchor="t"/>
           <a:lstStyle/>
           <a:p>
-            <a:pPr algn="l" indent="0" marL="0">
+            <a:pPr marL="0" indent="0" algn="l">
               <a:lnSpc>
                 <a:spcPts val="2500"/>
               </a:lnSpc>
@@ -10172,7 +9995,7 @@
           <a:bodyPr wrap="none" lIns="0" tIns="0" rIns="0" bIns="0" rtlCol="0" anchor="t"/>
           <a:lstStyle/>
           <a:p>
-            <a:pPr algn="l" marL="342900" indent="-342900">
+            <a:pPr marL="342900" indent="-342900" algn="l">
               <a:lnSpc>
                 <a:spcPts val="2550"/>
               </a:lnSpc>
@@ -10215,7 +10038,7 @@
           <a:bodyPr wrap="none" lIns="0" tIns="0" rIns="0" bIns="0" rtlCol="0" anchor="t"/>
           <a:lstStyle/>
           <a:p>
-            <a:pPr algn="l" marL="342900" indent="-342900">
+            <a:pPr marL="342900" indent="-342900" algn="l">
               <a:lnSpc>
                 <a:spcPts val="2550"/>
               </a:lnSpc>
@@ -10258,7 +10081,7 @@
           <a:bodyPr wrap="none" lIns="0" tIns="0" rIns="0" bIns="0" rtlCol="0" anchor="t"/>
           <a:lstStyle/>
           <a:p>
-            <a:pPr algn="l" marL="342900" indent="-342900">
+            <a:pPr marL="342900" indent="-342900" algn="l">
               <a:lnSpc>
                 <a:spcPts val="2550"/>
               </a:lnSpc>
@@ -10282,14 +10105,14 @@
       </p:sp>
       <p:pic>
         <p:nvPicPr>
-          <p:cNvPr id="9" name="Image 0" descr="preencoded.png">    </p:cNvPr>
+          <p:cNvPr id="9" name="Image 0" descr="preencoded.png"/>
           <p:cNvPicPr>
             <a:picLocks noChangeAspect="1"/>
           </p:cNvPicPr>
           <p:nvPr/>
         </p:nvPicPr>
         <p:blipFill>
-          <a:blip r:embed="rId1"/>
+          <a:blip r:embed="rId3"/>
           <a:stretch>
             <a:fillRect/>
           </a:stretch>
@@ -10350,7 +10173,7 @@
           <a:bodyPr wrap="none" lIns="0" tIns="0" rIns="0" bIns="0" rtlCol="0" anchor="t"/>
           <a:lstStyle/>
           <a:p>
-            <a:pPr algn="l" indent="0" marL="0">
+            <a:pPr marL="0" indent="0" algn="l">
               <a:lnSpc>
                 <a:spcPts val="5550"/>
               </a:lnSpc>
@@ -10458,7 +10281,7 @@
           <a:bodyPr wrap="none" lIns="0" tIns="0" rIns="0" bIns="0" rtlCol="0" anchor="t"/>
           <a:lstStyle/>
           <a:p>
-            <a:pPr algn="l" indent="0" marL="0">
+            <a:pPr marL="0" indent="0" algn="l">
               <a:lnSpc>
                 <a:spcPts val="3400"/>
               </a:lnSpc>
@@ -10500,7 +10323,7 @@
           <a:bodyPr wrap="none" lIns="0" tIns="0" rIns="0" bIns="0" rtlCol="0" anchor="t"/>
           <a:lstStyle/>
           <a:p>
-            <a:pPr algn="l" indent="0" marL="0">
+            <a:pPr marL="0" indent="0" algn="l">
               <a:lnSpc>
                 <a:spcPts val="2750"/>
               </a:lnSpc>
@@ -10542,7 +10365,7 @@
           <a:bodyPr wrap="square" lIns="0" tIns="0" rIns="0" bIns="0" rtlCol="0" anchor="t"/>
           <a:lstStyle/>
           <a:p>
-            <a:pPr algn="l" indent="0" marL="0">
+            <a:pPr marL="0" indent="0" algn="l">
               <a:lnSpc>
                 <a:spcPts val="2850"/>
               </a:lnSpc>
@@ -10650,7 +10473,7 @@
           <a:bodyPr wrap="none" lIns="0" tIns="0" rIns="0" bIns="0" rtlCol="0" anchor="t"/>
           <a:lstStyle/>
           <a:p>
-            <a:pPr algn="l" indent="0" marL="0">
+            <a:pPr marL="0" indent="0" algn="l">
               <a:lnSpc>
                 <a:spcPts val="3400"/>
               </a:lnSpc>
@@ -10692,7 +10515,7 @@
           <a:bodyPr wrap="none" lIns="0" tIns="0" rIns="0" bIns="0" rtlCol="0" anchor="t"/>
           <a:lstStyle/>
           <a:p>
-            <a:pPr algn="l" indent="0" marL="0">
+            <a:pPr marL="0" indent="0" algn="l">
               <a:lnSpc>
                 <a:spcPts val="2750"/>
               </a:lnSpc>
@@ -10734,7 +10557,7 @@
           <a:bodyPr wrap="square" lIns="0" tIns="0" rIns="0" bIns="0" rtlCol="0" anchor="t"/>
           <a:lstStyle/>
           <a:p>
-            <a:pPr algn="l" indent="0" marL="0">
+            <a:pPr marL="0" indent="0" algn="l">
               <a:lnSpc>
                 <a:spcPts val="2850"/>
               </a:lnSpc>
@@ -10842,7 +10665,7 @@
           <a:bodyPr wrap="none" lIns="0" tIns="0" rIns="0" bIns="0" rtlCol="0" anchor="t"/>
           <a:lstStyle/>
           <a:p>
-            <a:pPr algn="l" indent="0" marL="0">
+            <a:pPr marL="0" indent="0" algn="l">
               <a:lnSpc>
                 <a:spcPts val="3400"/>
               </a:lnSpc>
@@ -10884,7 +10707,7 @@
           <a:bodyPr wrap="none" lIns="0" tIns="0" rIns="0" bIns="0" rtlCol="0" anchor="t"/>
           <a:lstStyle/>
           <a:p>
-            <a:pPr algn="l" indent="0" marL="0">
+            <a:pPr marL="0" indent="0" algn="l">
               <a:lnSpc>
                 <a:spcPts val="2750"/>
               </a:lnSpc>
@@ -10926,7 +10749,7 @@
           <a:bodyPr wrap="square" lIns="0" tIns="0" rIns="0" bIns="0" rtlCol="0" anchor="t"/>
           <a:lstStyle/>
           <a:p>
-            <a:pPr algn="l" indent="0" marL="0">
+            <a:pPr marL="0" indent="0" algn="l">
               <a:lnSpc>
                 <a:spcPts val="2850"/>
               </a:lnSpc>
@@ -10968,7 +10791,7 @@
           <a:bodyPr wrap="none" lIns="0" tIns="0" rIns="0" bIns="0" rtlCol="0" anchor="t"/>
           <a:lstStyle/>
           <a:p>
-            <a:pPr algn="l" indent="0" marL="0">
+            <a:pPr marL="0" indent="0" algn="l">
               <a:lnSpc>
                 <a:spcPts val="2850"/>
               </a:lnSpc>
@@ -11035,7 +10858,7 @@
           <a:bodyPr wrap="none" lIns="0" tIns="0" rIns="0" bIns="0" rtlCol="0" anchor="t"/>
           <a:lstStyle/>
           <a:p>
-            <a:pPr algn="l" indent="0" marL="0">
+            <a:pPr marL="0" indent="0" algn="l">
               <a:lnSpc>
                 <a:spcPts val="5300"/>
               </a:lnSpc>
@@ -11077,7 +10900,7 @@
           <a:bodyPr wrap="none" lIns="0" tIns="0" rIns="0" bIns="0" rtlCol="0" anchor="t"/>
           <a:lstStyle/>
           <a:p>
-            <a:pPr algn="l" indent="0" marL="0">
+            <a:pPr marL="0" indent="0" algn="l">
               <a:lnSpc>
                 <a:spcPts val="2650"/>
               </a:lnSpc>
@@ -11119,7 +10942,7 @@
           <a:bodyPr wrap="square" lIns="0" tIns="0" rIns="0" bIns="0" rtlCol="0" anchor="t"/>
           <a:lstStyle/>
           <a:p>
-            <a:pPr algn="l" indent="0" marL="0">
+            <a:pPr marL="0" indent="0" algn="l">
               <a:lnSpc>
                 <a:spcPts val="2700"/>
               </a:lnSpc>
@@ -11161,7 +10984,7 @@
           <a:bodyPr wrap="none" lIns="0" tIns="0" rIns="0" bIns="0" rtlCol="0" anchor="t"/>
           <a:lstStyle/>
           <a:p>
-            <a:pPr algn="ctr" indent="0" marL="0">
+            <a:pPr marL="0" indent="0" algn="ctr">
               <a:lnSpc>
                 <a:spcPts val="4200"/>
               </a:lnSpc>
@@ -11184,307 +11007,7 @@
       </p:sp>
       <p:pic>
         <p:nvPicPr>
-          <p:cNvPr id="6" name="Image 0" descr="preencoded.png">    </p:cNvPr>
-          <p:cNvPicPr>
-            <a:picLocks noChangeAspect="1"/>
-          </p:cNvPicPr>
-          <p:nvPr/>
-        </p:nvPicPr>
-        <p:blipFill>
-          <a:blip r:embed="rId1"/>
-          <a:stretch>
-            <a:fillRect/>
-          </a:stretch>
-        </p:blipFill>
-        <p:spPr>
-          <a:xfrm>
-            <a:off x="1261705" y="3161348"/>
-            <a:ext cx="3232190" cy="3232190"/>
-          </a:xfrm>
-          <a:prstGeom prst="rect">
-            <a:avLst/>
-          </a:prstGeom>
-        </p:spPr>
-      </p:pic>
-      <p:sp>
-        <p:nvSpPr>
-          <p:cNvPr id="7" name="Text 4"/>
-          <p:cNvSpPr/>
-          <p:nvPr/>
-        </p:nvSpPr>
-        <p:spPr>
-          <a:xfrm>
-            <a:off x="1531025" y="6662738"/>
-            <a:ext cx="2693551" cy="336590"/>
-          </a:xfrm>
-          <a:prstGeom prst="rect">
-            <a:avLst/>
-          </a:prstGeom>
-          <a:noFill/>
-          <a:ln/>
-        </p:spPr>
-        <p:txBody>
-          <a:bodyPr wrap="none" lIns="0" tIns="0" rIns="0" bIns="0" rtlCol="0" anchor="t"/>
-          <a:lstStyle/>
-          <a:p>
-            <a:pPr algn="ctr" indent="0" marL="0">
-              <a:lnSpc>
-                <a:spcPts val="2650"/>
-              </a:lnSpc>
-              <a:buNone/>
-            </a:pPr>
-            <a:r>
-              <a:rPr lang="en-US" sz="2100" dirty="0">
-                <a:solidFill>
-                  <a:srgbClr val="2C2821"/>
-                </a:solidFill>
-                <a:latin typeface="Alice" pitchFamily="34" charset="0"/>
-                <a:ea typeface="Alice" pitchFamily="34" charset="-122"/>
-                <a:cs typeface="Alice" pitchFamily="34" charset="-120"/>
-              </a:rPr>
-              <a:t>通過率要求</a:t>
-            </a:r>
-            <a:endParaRPr lang="en-US" sz="2100" dirty="0"/>
-          </a:p>
-        </p:txBody>
-      </p:sp>
-      <p:sp>
-        <p:nvSpPr>
-          <p:cNvPr id="8" name="Text 5"/>
-          <p:cNvSpPr/>
-          <p:nvPr/>
-        </p:nvSpPr>
-        <p:spPr>
-          <a:xfrm>
-            <a:off x="793790" y="7128510"/>
-            <a:ext cx="4168021" cy="344805"/>
-          </a:xfrm>
-          <a:prstGeom prst="rect">
-            <a:avLst/>
-          </a:prstGeom>
-          <a:noFill/>
-          <a:ln/>
-        </p:spPr>
-        <p:txBody>
-          <a:bodyPr wrap="none" lIns="0" tIns="0" rIns="0" bIns="0" rtlCol="0" anchor="t"/>
-          <a:lstStyle/>
-          <a:p>
-            <a:pPr algn="ctr" indent="0" marL="0">
-              <a:lnSpc>
-                <a:spcPts val="2700"/>
-              </a:lnSpc>
-              <a:buNone/>
-            </a:pPr>
-            <a:r>
-              <a:rPr lang="en-US" sz="1650" dirty="0">
-                <a:solidFill>
-                  <a:srgbClr val="2C2821"/>
-                </a:solidFill>
-                <a:latin typeface="Lora" pitchFamily="34" charset="0"/>
-                <a:ea typeface="Lora" pitchFamily="34" charset="-122"/>
-                <a:cs typeface="Lora" pitchFamily="34" charset="-120"/>
-              </a:rPr>
-              <a:t>嚴格品質標準</a:t>
-            </a:r>
-            <a:endParaRPr lang="en-US" sz="1650" dirty="0"/>
-          </a:p>
-        </p:txBody>
-      </p:sp>
-      <p:sp>
-        <p:nvSpPr>
-          <p:cNvPr id="9" name="Text 6"/>
-          <p:cNvSpPr/>
-          <p:nvPr/>
-        </p:nvSpPr>
-        <p:spPr>
-          <a:xfrm>
-            <a:off x="5989915" y="4508063"/>
-            <a:ext cx="2650331" cy="538639"/>
-          </a:xfrm>
-          <a:prstGeom prst="rect">
-            <a:avLst/>
-          </a:prstGeom>
-          <a:noFill/>
-          <a:ln/>
-        </p:spPr>
-        <p:txBody>
-          <a:bodyPr wrap="none" lIns="0" tIns="0" rIns="0" bIns="0" rtlCol="0" anchor="t"/>
-          <a:lstStyle/>
-          <a:p>
-            <a:pPr algn="ctr" indent="0" marL="0">
-              <a:lnSpc>
-                <a:spcPts val="4200"/>
-              </a:lnSpc>
-              <a:buNone/>
-            </a:pPr>
-            <a:r>
-              <a:rPr lang="en-US" sz="4200" dirty="0">
-                <a:solidFill>
-                  <a:srgbClr val="2C2821"/>
-                </a:solidFill>
-                <a:latin typeface="Alice" pitchFamily="34" charset="0"/>
-                <a:ea typeface="Alice" pitchFamily="34" charset="-122"/>
-                <a:cs typeface="Alice" pitchFamily="34" charset="-120"/>
-              </a:rPr>
-              <a:t>50-100</a:t>
-            </a:r>
-            <a:endParaRPr lang="en-US" sz="4200" dirty="0"/>
-          </a:p>
-        </p:txBody>
-      </p:sp>
-      <p:pic>
-        <p:nvPicPr>
-          <p:cNvPr id="10" name="Image 1" descr="preencoded.png">    </p:cNvPr>
-          <p:cNvPicPr>
-            <a:picLocks noChangeAspect="1"/>
-          </p:cNvPicPr>
-          <p:nvPr/>
-        </p:nvPicPr>
-        <p:blipFill>
-          <a:blip r:embed="rId2"/>
-          <a:stretch>
-            <a:fillRect/>
-          </a:stretch>
-        </p:blipFill>
-        <p:spPr>
-          <a:xfrm>
-            <a:off x="5699046" y="3161348"/>
-            <a:ext cx="3232190" cy="3232190"/>
-          </a:xfrm>
-          <a:prstGeom prst="rect">
-            <a:avLst/>
-          </a:prstGeom>
-        </p:spPr>
-      </p:pic>
-      <p:sp>
-        <p:nvSpPr>
-          <p:cNvPr id="11" name="Text 7"/>
-          <p:cNvSpPr/>
-          <p:nvPr/>
-        </p:nvSpPr>
-        <p:spPr>
-          <a:xfrm>
-            <a:off x="5968365" y="6662738"/>
-            <a:ext cx="2693551" cy="336590"/>
-          </a:xfrm>
-          <a:prstGeom prst="rect">
-            <a:avLst/>
-          </a:prstGeom>
-          <a:noFill/>
-          <a:ln/>
-        </p:spPr>
-        <p:txBody>
-          <a:bodyPr wrap="none" lIns="0" tIns="0" rIns="0" bIns="0" rtlCol="0" anchor="t"/>
-          <a:lstStyle/>
-          <a:p>
-            <a:pPr algn="ctr" indent="0" marL="0">
-              <a:lnSpc>
-                <a:spcPts val="2650"/>
-              </a:lnSpc>
-              <a:buNone/>
-            </a:pPr>
-            <a:r>
-              <a:rPr lang="en-US" sz="2100" dirty="0">
-                <a:solidFill>
-                  <a:srgbClr val="2C2821"/>
-                </a:solidFill>
-                <a:latin typeface="Alice" pitchFamily="34" charset="0"/>
-                <a:ea typeface="Alice" pitchFamily="34" charset="-122"/>
-                <a:cs typeface="Alice" pitchFamily="34" charset="-120"/>
-              </a:rPr>
-              <a:t>測試輪數</a:t>
-            </a:r>
-            <a:endParaRPr lang="en-US" sz="2100" dirty="0"/>
-          </a:p>
-        </p:txBody>
-      </p:sp>
-      <p:sp>
-        <p:nvSpPr>
-          <p:cNvPr id="12" name="Text 8"/>
-          <p:cNvSpPr/>
-          <p:nvPr/>
-        </p:nvSpPr>
-        <p:spPr>
-          <a:xfrm>
-            <a:off x="5231130" y="7128510"/>
-            <a:ext cx="4168021" cy="344805"/>
-          </a:xfrm>
-          <a:prstGeom prst="rect">
-            <a:avLst/>
-          </a:prstGeom>
-          <a:noFill/>
-          <a:ln/>
-        </p:spPr>
-        <p:txBody>
-          <a:bodyPr wrap="none" lIns="0" tIns="0" rIns="0" bIns="0" rtlCol="0" anchor="t"/>
-          <a:lstStyle/>
-          <a:p>
-            <a:pPr algn="ctr" indent="0" marL="0">
-              <a:lnSpc>
-                <a:spcPts val="2700"/>
-              </a:lnSpc>
-              <a:buNone/>
-            </a:pPr>
-            <a:r>
-              <a:rPr lang="en-US" sz="1650" dirty="0">
-                <a:solidFill>
-                  <a:srgbClr val="2C2821"/>
-                </a:solidFill>
-                <a:latin typeface="Lora" pitchFamily="34" charset="0"/>
-                <a:ea typeface="Lora" pitchFamily="34" charset="-122"/>
-                <a:cs typeface="Lora" pitchFamily="34" charset="-120"/>
-              </a:rPr>
-              <a:t>連續執行驗證</a:t>
-            </a:r>
-            <a:endParaRPr lang="en-US" sz="1650" dirty="0"/>
-          </a:p>
-        </p:txBody>
-      </p:sp>
-      <p:sp>
-        <p:nvSpPr>
-          <p:cNvPr id="13" name="Text 9"/>
-          <p:cNvSpPr/>
-          <p:nvPr/>
-        </p:nvSpPr>
-        <p:spPr>
-          <a:xfrm>
-            <a:off x="10427256" y="4508063"/>
-            <a:ext cx="2650331" cy="538639"/>
-          </a:xfrm>
-          <a:prstGeom prst="rect">
-            <a:avLst/>
-          </a:prstGeom>
-          <a:noFill/>
-          <a:ln/>
-        </p:spPr>
-        <p:txBody>
-          <a:bodyPr wrap="none" lIns="0" tIns="0" rIns="0" bIns="0" rtlCol="0" anchor="t"/>
-          <a:lstStyle/>
-          <a:p>
-            <a:pPr algn="ctr" indent="0" marL="0">
-              <a:lnSpc>
-                <a:spcPts val="4200"/>
-              </a:lnSpc>
-              <a:buNone/>
-            </a:pPr>
-            <a:r>
-              <a:rPr lang="en-US" sz="4200" dirty="0">
-                <a:solidFill>
-                  <a:srgbClr val="2C2821"/>
-                </a:solidFill>
-                <a:latin typeface="Alice" pitchFamily="34" charset="0"/>
-                <a:ea typeface="Alice" pitchFamily="34" charset="-122"/>
-                <a:cs typeface="Alice" pitchFamily="34" charset="-120"/>
-              </a:rPr>
-              <a:t>72</a:t>
-            </a:r>
-            <a:endParaRPr lang="en-US" sz="4200" dirty="0"/>
-          </a:p>
-        </p:txBody>
-      </p:sp>
-      <p:pic>
-        <p:nvPicPr>
-          <p:cNvPr id="14" name="Image 2" descr="preencoded.png">    </p:cNvPr>
+          <p:cNvPr id="6" name="Image 0" descr="preencoded.png"/>
           <p:cNvPicPr>
             <a:picLocks noChangeAspect="1"/>
           </p:cNvPicPr>
@@ -11498,7 +11021,7 @@
         </p:blipFill>
         <p:spPr>
           <a:xfrm>
-            <a:off x="10136386" y="3161348"/>
+            <a:off x="1261705" y="3161348"/>
             <a:ext cx="3232190" cy="3232190"/>
           </a:xfrm>
           <a:prstGeom prst="rect">
@@ -11508,13 +11031,13 @@
       </p:pic>
       <p:sp>
         <p:nvSpPr>
-          <p:cNvPr id="15" name="Text 10"/>
-          <p:cNvSpPr/>
-          <p:nvPr/>
-        </p:nvSpPr>
-        <p:spPr>
-          <a:xfrm>
-            <a:off x="10405705" y="6662738"/>
+          <p:cNvPr id="7" name="Text 4"/>
+          <p:cNvSpPr/>
+          <p:nvPr/>
+        </p:nvSpPr>
+        <p:spPr>
+          <a:xfrm>
+            <a:off x="1531025" y="6662738"/>
             <a:ext cx="2693551" cy="336590"/>
           </a:xfrm>
           <a:prstGeom prst="rect">
@@ -11527,7 +11050,7 @@
           <a:bodyPr wrap="none" lIns="0" tIns="0" rIns="0" bIns="0" rtlCol="0" anchor="t"/>
           <a:lstStyle/>
           <a:p>
-            <a:pPr algn="ctr" indent="0" marL="0">
+            <a:pPr marL="0" indent="0" algn="ctr">
               <a:lnSpc>
                 <a:spcPts val="2650"/>
               </a:lnSpc>
@@ -11542,6 +11065,306 @@
                 <a:ea typeface="Alice" pitchFamily="34" charset="-122"/>
                 <a:cs typeface="Alice" pitchFamily="34" charset="-120"/>
               </a:rPr>
+              <a:t>通過率要求</a:t>
+            </a:r>
+            <a:endParaRPr lang="en-US" sz="2100" dirty="0"/>
+          </a:p>
+        </p:txBody>
+      </p:sp>
+      <p:sp>
+        <p:nvSpPr>
+          <p:cNvPr id="8" name="Text 5"/>
+          <p:cNvSpPr/>
+          <p:nvPr/>
+        </p:nvSpPr>
+        <p:spPr>
+          <a:xfrm>
+            <a:off x="793790" y="7128510"/>
+            <a:ext cx="4168021" cy="344805"/>
+          </a:xfrm>
+          <a:prstGeom prst="rect">
+            <a:avLst/>
+          </a:prstGeom>
+          <a:noFill/>
+          <a:ln/>
+        </p:spPr>
+        <p:txBody>
+          <a:bodyPr wrap="none" lIns="0" tIns="0" rIns="0" bIns="0" rtlCol="0" anchor="t"/>
+          <a:lstStyle/>
+          <a:p>
+            <a:pPr marL="0" indent="0" algn="ctr">
+              <a:lnSpc>
+                <a:spcPts val="2700"/>
+              </a:lnSpc>
+              <a:buNone/>
+            </a:pPr>
+            <a:r>
+              <a:rPr lang="en-US" sz="1650" dirty="0">
+                <a:solidFill>
+                  <a:srgbClr val="2C2821"/>
+                </a:solidFill>
+                <a:latin typeface="Lora" pitchFamily="34" charset="0"/>
+                <a:ea typeface="Lora" pitchFamily="34" charset="-122"/>
+                <a:cs typeface="Lora" pitchFamily="34" charset="-120"/>
+              </a:rPr>
+              <a:t>嚴格品質標準</a:t>
+            </a:r>
+            <a:endParaRPr lang="en-US" sz="1650" dirty="0"/>
+          </a:p>
+        </p:txBody>
+      </p:sp>
+      <p:sp>
+        <p:nvSpPr>
+          <p:cNvPr id="9" name="Text 6"/>
+          <p:cNvSpPr/>
+          <p:nvPr/>
+        </p:nvSpPr>
+        <p:spPr>
+          <a:xfrm>
+            <a:off x="5989915" y="4508063"/>
+            <a:ext cx="2650331" cy="538639"/>
+          </a:xfrm>
+          <a:prstGeom prst="rect">
+            <a:avLst/>
+          </a:prstGeom>
+          <a:noFill/>
+          <a:ln/>
+        </p:spPr>
+        <p:txBody>
+          <a:bodyPr wrap="none" lIns="0" tIns="0" rIns="0" bIns="0" rtlCol="0" anchor="t"/>
+          <a:lstStyle/>
+          <a:p>
+            <a:pPr marL="0" indent="0" algn="ctr">
+              <a:lnSpc>
+                <a:spcPts val="4200"/>
+              </a:lnSpc>
+              <a:buNone/>
+            </a:pPr>
+            <a:r>
+              <a:rPr lang="en-US" sz="4200" dirty="0">
+                <a:solidFill>
+                  <a:srgbClr val="2C2821"/>
+                </a:solidFill>
+                <a:latin typeface="Alice" pitchFamily="34" charset="0"/>
+                <a:ea typeface="Alice" pitchFamily="34" charset="-122"/>
+                <a:cs typeface="Alice" pitchFamily="34" charset="-120"/>
+              </a:rPr>
+              <a:t>50-100</a:t>
+            </a:r>
+            <a:endParaRPr lang="en-US" sz="4200" dirty="0"/>
+          </a:p>
+        </p:txBody>
+      </p:sp>
+      <p:pic>
+        <p:nvPicPr>
+          <p:cNvPr id="10" name="Image 1" descr="preencoded.png"/>
+          <p:cNvPicPr>
+            <a:picLocks noChangeAspect="1"/>
+          </p:cNvPicPr>
+          <p:nvPr/>
+        </p:nvPicPr>
+        <p:blipFill>
+          <a:blip r:embed="rId4"/>
+          <a:stretch>
+            <a:fillRect/>
+          </a:stretch>
+        </p:blipFill>
+        <p:spPr>
+          <a:xfrm>
+            <a:off x="5699046" y="3161348"/>
+            <a:ext cx="3232190" cy="3232190"/>
+          </a:xfrm>
+          <a:prstGeom prst="rect">
+            <a:avLst/>
+          </a:prstGeom>
+        </p:spPr>
+      </p:pic>
+      <p:sp>
+        <p:nvSpPr>
+          <p:cNvPr id="11" name="Text 7"/>
+          <p:cNvSpPr/>
+          <p:nvPr/>
+        </p:nvSpPr>
+        <p:spPr>
+          <a:xfrm>
+            <a:off x="5968365" y="6662738"/>
+            <a:ext cx="2693551" cy="336590"/>
+          </a:xfrm>
+          <a:prstGeom prst="rect">
+            <a:avLst/>
+          </a:prstGeom>
+          <a:noFill/>
+          <a:ln/>
+        </p:spPr>
+        <p:txBody>
+          <a:bodyPr wrap="none" lIns="0" tIns="0" rIns="0" bIns="0" rtlCol="0" anchor="t"/>
+          <a:lstStyle/>
+          <a:p>
+            <a:pPr marL="0" indent="0" algn="ctr">
+              <a:lnSpc>
+                <a:spcPts val="2650"/>
+              </a:lnSpc>
+              <a:buNone/>
+            </a:pPr>
+            <a:r>
+              <a:rPr lang="en-US" sz="2100" dirty="0">
+                <a:solidFill>
+                  <a:srgbClr val="2C2821"/>
+                </a:solidFill>
+                <a:latin typeface="Alice" pitchFamily="34" charset="0"/>
+                <a:ea typeface="Alice" pitchFamily="34" charset="-122"/>
+                <a:cs typeface="Alice" pitchFamily="34" charset="-120"/>
+              </a:rPr>
+              <a:t>測試輪數</a:t>
+            </a:r>
+            <a:endParaRPr lang="en-US" sz="2100" dirty="0"/>
+          </a:p>
+        </p:txBody>
+      </p:sp>
+      <p:sp>
+        <p:nvSpPr>
+          <p:cNvPr id="12" name="Text 8"/>
+          <p:cNvSpPr/>
+          <p:nvPr/>
+        </p:nvSpPr>
+        <p:spPr>
+          <a:xfrm>
+            <a:off x="5231130" y="7128510"/>
+            <a:ext cx="4168021" cy="344805"/>
+          </a:xfrm>
+          <a:prstGeom prst="rect">
+            <a:avLst/>
+          </a:prstGeom>
+          <a:noFill/>
+          <a:ln/>
+        </p:spPr>
+        <p:txBody>
+          <a:bodyPr wrap="none" lIns="0" tIns="0" rIns="0" bIns="0" rtlCol="0" anchor="t"/>
+          <a:lstStyle/>
+          <a:p>
+            <a:pPr marL="0" indent="0" algn="ctr">
+              <a:lnSpc>
+                <a:spcPts val="2700"/>
+              </a:lnSpc>
+              <a:buNone/>
+            </a:pPr>
+            <a:r>
+              <a:rPr lang="en-US" sz="1650" dirty="0">
+                <a:solidFill>
+                  <a:srgbClr val="2C2821"/>
+                </a:solidFill>
+                <a:latin typeface="Lora" pitchFamily="34" charset="0"/>
+                <a:ea typeface="Lora" pitchFamily="34" charset="-122"/>
+                <a:cs typeface="Lora" pitchFamily="34" charset="-120"/>
+              </a:rPr>
+              <a:t>連續執行驗證</a:t>
+            </a:r>
+            <a:endParaRPr lang="en-US" sz="1650" dirty="0"/>
+          </a:p>
+        </p:txBody>
+      </p:sp>
+      <p:sp>
+        <p:nvSpPr>
+          <p:cNvPr id="13" name="Text 9"/>
+          <p:cNvSpPr/>
+          <p:nvPr/>
+        </p:nvSpPr>
+        <p:spPr>
+          <a:xfrm>
+            <a:off x="10427256" y="4508063"/>
+            <a:ext cx="2650331" cy="538639"/>
+          </a:xfrm>
+          <a:prstGeom prst="rect">
+            <a:avLst/>
+          </a:prstGeom>
+          <a:noFill/>
+          <a:ln/>
+        </p:spPr>
+        <p:txBody>
+          <a:bodyPr wrap="none" lIns="0" tIns="0" rIns="0" bIns="0" rtlCol="0" anchor="t"/>
+          <a:lstStyle/>
+          <a:p>
+            <a:pPr marL="0" indent="0" algn="ctr">
+              <a:lnSpc>
+                <a:spcPts val="4200"/>
+              </a:lnSpc>
+              <a:buNone/>
+            </a:pPr>
+            <a:r>
+              <a:rPr lang="en-US" sz="4200" dirty="0">
+                <a:solidFill>
+                  <a:srgbClr val="2C2821"/>
+                </a:solidFill>
+                <a:latin typeface="Alice" pitchFamily="34" charset="0"/>
+                <a:ea typeface="Alice" pitchFamily="34" charset="-122"/>
+                <a:cs typeface="Alice" pitchFamily="34" charset="-120"/>
+              </a:rPr>
+              <a:t>72</a:t>
+            </a:r>
+            <a:endParaRPr lang="en-US" sz="4200" dirty="0"/>
+          </a:p>
+        </p:txBody>
+      </p:sp>
+      <p:pic>
+        <p:nvPicPr>
+          <p:cNvPr id="14" name="Image 2" descr="preencoded.png"/>
+          <p:cNvPicPr>
+            <a:picLocks noChangeAspect="1"/>
+          </p:cNvPicPr>
+          <p:nvPr/>
+        </p:nvPicPr>
+        <p:blipFill>
+          <a:blip r:embed="rId5"/>
+          <a:stretch>
+            <a:fillRect/>
+          </a:stretch>
+        </p:blipFill>
+        <p:spPr>
+          <a:xfrm>
+            <a:off x="10136386" y="3161348"/>
+            <a:ext cx="3232190" cy="3232190"/>
+          </a:xfrm>
+          <a:prstGeom prst="rect">
+            <a:avLst/>
+          </a:prstGeom>
+        </p:spPr>
+      </p:pic>
+      <p:sp>
+        <p:nvSpPr>
+          <p:cNvPr id="15" name="Text 10"/>
+          <p:cNvSpPr/>
+          <p:nvPr/>
+        </p:nvSpPr>
+        <p:spPr>
+          <a:xfrm>
+            <a:off x="10405705" y="6662738"/>
+            <a:ext cx="2693551" cy="336590"/>
+          </a:xfrm>
+          <a:prstGeom prst="rect">
+            <a:avLst/>
+          </a:prstGeom>
+          <a:noFill/>
+          <a:ln/>
+        </p:spPr>
+        <p:txBody>
+          <a:bodyPr wrap="none" lIns="0" tIns="0" rIns="0" bIns="0" rtlCol="0" anchor="t"/>
+          <a:lstStyle/>
+          <a:p>
+            <a:pPr marL="0" indent="0" algn="ctr">
+              <a:lnSpc>
+                <a:spcPts val="2650"/>
+              </a:lnSpc>
+              <a:buNone/>
+            </a:pPr>
+            <a:r>
+              <a:rPr lang="en-US" sz="2100" dirty="0">
+                <a:solidFill>
+                  <a:srgbClr val="2C2821"/>
+                </a:solidFill>
+                <a:latin typeface="Alice" pitchFamily="34" charset="0"/>
+                <a:ea typeface="Alice" pitchFamily="34" charset="-122"/>
+                <a:cs typeface="Alice" pitchFamily="34" charset="-120"/>
+              </a:rPr>
               <a:t>有效時數</a:t>
             </a:r>
             <a:endParaRPr lang="en-US" sz="2100" dirty="0"/>
@@ -11569,7 +11392,7 @@
           <a:bodyPr wrap="none" lIns="0" tIns="0" rIns="0" bIns="0" rtlCol="0" anchor="t"/>
           <a:lstStyle/>
           <a:p>
-            <a:pPr algn="ctr" indent="0" marL="0">
+            <a:pPr marL="0" indent="0" algn="ctr">
               <a:lnSpc>
                 <a:spcPts val="2700"/>
               </a:lnSpc>
@@ -11636,7 +11459,7 @@
           <a:bodyPr wrap="none" lIns="0" tIns="0" rIns="0" bIns="0" rtlCol="0" anchor="t"/>
           <a:lstStyle/>
           <a:p>
-            <a:pPr algn="l" indent="0" marL="0">
+            <a:pPr marL="0" indent="0" algn="l">
               <a:lnSpc>
                 <a:spcPts val="5550"/>
               </a:lnSpc>
@@ -11659,121 +11482,7 @@
       </p:sp>
       <p:pic>
         <p:nvPicPr>
-          <p:cNvPr id="3" name="Image 0" descr="preencoded.png">    </p:cNvPr>
-          <p:cNvPicPr>
-            <a:picLocks noChangeAspect="1"/>
-          </p:cNvPicPr>
-          <p:nvPr/>
-        </p:nvPicPr>
-        <p:blipFill>
-          <a:blip r:embed="rId1">
-            <a:extLst>
-              <a:ext uri="{96DAC541-7B7A-43D3-8B79-37D633B846F1}">
-                <asvg:svgBlip xmlns:asvg="http://schemas.microsoft.com/office/drawing/2016/SVG/main" r:embed="rId2"/>
-              </a:ext>
-            </a:extLst>
-          </a:blip>
-          <a:stretch>
-            <a:fillRect/>
-          </a:stretch>
-        </p:blipFill>
-        <p:spPr>
-          <a:xfrm>
-            <a:off x="793790" y="3629263"/>
-            <a:ext cx="680442" cy="680442"/>
-          </a:xfrm>
-          <a:prstGeom prst="rect">
-            <a:avLst/>
-          </a:prstGeom>
-        </p:spPr>
-      </p:pic>
-      <p:sp>
-        <p:nvSpPr>
-          <p:cNvPr id="4" name="Text 1"/>
-          <p:cNvSpPr/>
-          <p:nvPr/>
-        </p:nvSpPr>
-        <p:spPr>
-          <a:xfrm>
-            <a:off x="1757720" y="3820597"/>
-            <a:ext cx="2835235" cy="354330"/>
-          </a:xfrm>
-          <a:prstGeom prst="rect">
-            <a:avLst/>
-          </a:prstGeom>
-          <a:noFill/>
-          <a:ln/>
-        </p:spPr>
-        <p:txBody>
-          <a:bodyPr wrap="none" lIns="0" tIns="0" rIns="0" bIns="0" rtlCol="0" anchor="t"/>
-          <a:lstStyle/>
-          <a:p>
-            <a:pPr algn="l" indent="0" marL="0">
-              <a:lnSpc>
-                <a:spcPts val="2750"/>
-              </a:lnSpc>
-              <a:buNone/>
-            </a:pPr>
-            <a:r>
-              <a:rPr lang="en-US" sz="2200" dirty="0">
-                <a:solidFill>
-                  <a:srgbClr val="2C2821"/>
-                </a:solidFill>
-                <a:latin typeface="Alice" pitchFamily="34" charset="0"/>
-                <a:ea typeface="Alice" pitchFamily="34" charset="-122"/>
-                <a:cs typeface="Alice" pitchFamily="34" charset="-120"/>
-              </a:rPr>
-              <a:t>記憶體洩漏偵測</a:t>
-            </a:r>
-            <a:endParaRPr lang="en-US" sz="2200" dirty="0"/>
-          </a:p>
-        </p:txBody>
-      </p:sp>
-      <p:sp>
-        <p:nvSpPr>
-          <p:cNvPr id="5" name="Text 2"/>
-          <p:cNvSpPr/>
-          <p:nvPr/>
-        </p:nvSpPr>
-        <p:spPr>
-          <a:xfrm>
-            <a:off x="1757720" y="4311015"/>
-            <a:ext cx="3194685" cy="1451610"/>
-          </a:xfrm>
-          <a:prstGeom prst="rect">
-            <a:avLst/>
-          </a:prstGeom>
-          <a:noFill/>
-          <a:ln/>
-        </p:spPr>
-        <p:txBody>
-          <a:bodyPr wrap="square" lIns="0" tIns="0" rIns="0" bIns="0" rtlCol="0" anchor="t"/>
-          <a:lstStyle/>
-          <a:p>
-            <a:pPr algn="l" indent="0" marL="0">
-              <a:lnSpc>
-                <a:spcPts val="2850"/>
-              </a:lnSpc>
-              <a:buNone/>
-            </a:pPr>
-            <a:r>
-              <a:rPr lang="en-US" sz="1750" dirty="0">
-                <a:solidFill>
-                  <a:srgbClr val="2C2821"/>
-                </a:solidFill>
-                <a:latin typeface="Lora" pitchFamily="34" charset="0"/>
-                <a:ea typeface="Lora" pitchFamily="34" charset="-122"/>
-                <a:cs typeface="Lora" pitchFamily="34" charset="-120"/>
-              </a:rPr>
-              <a:t>監控每輪測試前後的記憶體使用量，單輪增長超過 100MB 視為異常，累計超過 10 次將阻擋提交</a:t>
-            </a:r>
-            <a:endParaRPr lang="en-US" sz="1750" dirty="0"/>
-          </a:p>
-        </p:txBody>
-      </p:sp>
-      <p:pic>
-        <p:nvPicPr>
-          <p:cNvPr id="6" name="Image 1" descr="preencoded.png">    </p:cNvPr>
+          <p:cNvPr id="3" name="Image 0" descr="preencoded.png"/>
           <p:cNvPicPr>
             <a:picLocks noChangeAspect="1"/>
           </p:cNvPicPr>
@@ -11793,7 +11502,7 @@
         </p:blipFill>
         <p:spPr>
           <a:xfrm>
-            <a:off x="5235893" y="3629263"/>
+            <a:off x="793790" y="3629263"/>
             <a:ext cx="680442" cy="680442"/>
           </a:xfrm>
           <a:prstGeom prst="rect">
@@ -11803,13 +11512,13 @@
       </p:pic>
       <p:sp>
         <p:nvSpPr>
-          <p:cNvPr id="7" name="Text 3"/>
-          <p:cNvSpPr/>
-          <p:nvPr/>
-        </p:nvSpPr>
-        <p:spPr>
-          <a:xfrm>
-            <a:off x="6199823" y="3820597"/>
+          <p:cNvPr id="4" name="Text 1"/>
+          <p:cNvSpPr/>
+          <p:nvPr/>
+        </p:nvSpPr>
+        <p:spPr>
+          <a:xfrm>
+            <a:off x="1757720" y="3820597"/>
             <a:ext cx="2835235" cy="354330"/>
           </a:xfrm>
           <a:prstGeom prst="rect">
@@ -11822,7 +11531,7 @@
           <a:bodyPr wrap="none" lIns="0" tIns="0" rIns="0" bIns="0" rtlCol="0" anchor="t"/>
           <a:lstStyle/>
           <a:p>
-            <a:pPr algn="l" indent="0" marL="0">
+            <a:pPr marL="0" indent="0" algn="l">
               <a:lnSpc>
                 <a:spcPts val="2750"/>
               </a:lnSpc>
@@ -11837,7 +11546,7 @@
                 <a:ea typeface="Alice" pitchFamily="34" charset="-122"/>
                 <a:cs typeface="Alice" pitchFamily="34" charset="-120"/>
               </a:rPr>
-              <a:t>資源使用率監控</a:t>
+              <a:t>記憶體洩漏偵測</a:t>
             </a:r>
             <a:endParaRPr lang="en-US" sz="2200" dirty="0"/>
           </a:p>
@@ -11845,14 +11554,14 @@
       </p:sp>
       <p:sp>
         <p:nvSpPr>
-          <p:cNvPr id="8" name="Text 4"/>
-          <p:cNvSpPr/>
-          <p:nvPr/>
-        </p:nvSpPr>
-        <p:spPr>
-          <a:xfrm>
-            <a:off x="6199823" y="4311015"/>
-            <a:ext cx="3194685" cy="1088708"/>
+          <p:cNvPr id="5" name="Text 2"/>
+          <p:cNvSpPr/>
+          <p:nvPr/>
+        </p:nvSpPr>
+        <p:spPr>
+          <a:xfrm>
+            <a:off x="1757720" y="4311015"/>
+            <a:ext cx="3194685" cy="1451610"/>
           </a:xfrm>
           <a:prstGeom prst="rect">
             <a:avLst/>
@@ -11864,7 +11573,7 @@
           <a:bodyPr wrap="square" lIns="0" tIns="0" rIns="0" bIns="0" rtlCol="0" anchor="t"/>
           <a:lstStyle/>
           <a:p>
-            <a:pPr algn="l" indent="0" marL="0">
+            <a:pPr marL="0" indent="0" algn="l">
               <a:lnSpc>
                 <a:spcPts val="2850"/>
               </a:lnSpc>
@@ -11879,7 +11588,7 @@
                 <a:ea typeface="Lora" pitchFamily="34" charset="-122"/>
                 <a:cs typeface="Lora" pitchFamily="34" charset="-120"/>
               </a:rPr>
-              <a:t>追蹤 CPU、記憶體、磁碟 I/O 使用情況，確保系統在高負載下依然穩定運行</a:t>
+              <a:t>監控每輪測試前後的記憶體使用量，單輪增長超過 100MB 視為異常，累計超過 10 次將阻擋提交</a:t>
             </a:r>
             <a:endParaRPr lang="en-US" sz="1750" dirty="0"/>
           </a:p>
@@ -11887,7 +11596,7 @@
       </p:sp>
       <p:pic>
         <p:nvPicPr>
-          <p:cNvPr id="9" name="Image 2" descr="preencoded.png">    </p:cNvPr>
+          <p:cNvPr id="6" name="Image 1" descr="preencoded.png"/>
           <p:cNvPicPr>
             <a:picLocks noChangeAspect="1"/>
           </p:cNvPicPr>
@@ -11907,7 +11616,7 @@
         </p:blipFill>
         <p:spPr>
           <a:xfrm>
-            <a:off x="9677995" y="3629263"/>
+            <a:off x="5235893" y="3629263"/>
             <a:ext cx="680442" cy="680442"/>
           </a:xfrm>
           <a:prstGeom prst="rect">
@@ -11917,13 +11626,13 @@
       </p:pic>
       <p:sp>
         <p:nvSpPr>
-          <p:cNvPr id="10" name="Text 5"/>
-          <p:cNvSpPr/>
-          <p:nvPr/>
-        </p:nvSpPr>
-        <p:spPr>
-          <a:xfrm>
-            <a:off x="10641925" y="3820597"/>
+          <p:cNvPr id="7" name="Text 3"/>
+          <p:cNvSpPr/>
+          <p:nvPr/>
+        </p:nvSpPr>
+        <p:spPr>
+          <a:xfrm>
+            <a:off x="6199823" y="3820597"/>
             <a:ext cx="2835235" cy="354330"/>
           </a:xfrm>
           <a:prstGeom prst="rect">
@@ -11936,7 +11645,7 @@
           <a:bodyPr wrap="none" lIns="0" tIns="0" rIns="0" bIns="0" rtlCol="0" anchor="t"/>
           <a:lstStyle/>
           <a:p>
-            <a:pPr algn="l" indent="0" marL="0">
+            <a:pPr marL="0" indent="0" algn="l">
               <a:lnSpc>
                 <a:spcPts val="2750"/>
               </a:lnSpc>
@@ -11951,6 +11660,120 @@
                 <a:ea typeface="Alice" pitchFamily="34" charset="-122"/>
                 <a:cs typeface="Alice" pitchFamily="34" charset="-120"/>
               </a:rPr>
+              <a:t>資源使用率監控</a:t>
+            </a:r>
+            <a:endParaRPr lang="en-US" sz="2200" dirty="0"/>
+          </a:p>
+        </p:txBody>
+      </p:sp>
+      <p:sp>
+        <p:nvSpPr>
+          <p:cNvPr id="8" name="Text 4"/>
+          <p:cNvSpPr/>
+          <p:nvPr/>
+        </p:nvSpPr>
+        <p:spPr>
+          <a:xfrm>
+            <a:off x="6199823" y="4311015"/>
+            <a:ext cx="3194685" cy="1088708"/>
+          </a:xfrm>
+          <a:prstGeom prst="rect">
+            <a:avLst/>
+          </a:prstGeom>
+          <a:noFill/>
+          <a:ln/>
+        </p:spPr>
+        <p:txBody>
+          <a:bodyPr wrap="square" lIns="0" tIns="0" rIns="0" bIns="0" rtlCol="0" anchor="t"/>
+          <a:lstStyle/>
+          <a:p>
+            <a:pPr marL="0" indent="0" algn="l">
+              <a:lnSpc>
+                <a:spcPts val="2850"/>
+              </a:lnSpc>
+              <a:buNone/>
+            </a:pPr>
+            <a:r>
+              <a:rPr lang="en-US" sz="1750" dirty="0">
+                <a:solidFill>
+                  <a:srgbClr val="2C2821"/>
+                </a:solidFill>
+                <a:latin typeface="Lora" pitchFamily="34" charset="0"/>
+                <a:ea typeface="Lora" pitchFamily="34" charset="-122"/>
+                <a:cs typeface="Lora" pitchFamily="34" charset="-120"/>
+              </a:rPr>
+              <a:t>追蹤 CPU、記憶體、磁碟 I/O 使用情況，確保系統在高負載下依然穩定運行</a:t>
+            </a:r>
+            <a:endParaRPr lang="en-US" sz="1750" dirty="0"/>
+          </a:p>
+        </p:txBody>
+      </p:sp>
+      <p:pic>
+        <p:nvPicPr>
+          <p:cNvPr id="9" name="Image 2" descr="preencoded.png"/>
+          <p:cNvPicPr>
+            <a:picLocks noChangeAspect="1"/>
+          </p:cNvPicPr>
+          <p:nvPr/>
+        </p:nvPicPr>
+        <p:blipFill>
+          <a:blip r:embed="rId7">
+            <a:extLst>
+              <a:ext uri="{96DAC541-7B7A-43D3-8B79-37D633B846F1}">
+                <asvg:svgBlip xmlns:asvg="http://schemas.microsoft.com/office/drawing/2016/SVG/main" r:embed="rId8"/>
+              </a:ext>
+            </a:extLst>
+          </a:blip>
+          <a:stretch>
+            <a:fillRect/>
+          </a:stretch>
+        </p:blipFill>
+        <p:spPr>
+          <a:xfrm>
+            <a:off x="9677995" y="3629263"/>
+            <a:ext cx="680442" cy="680442"/>
+          </a:xfrm>
+          <a:prstGeom prst="rect">
+            <a:avLst/>
+          </a:prstGeom>
+        </p:spPr>
+      </p:pic>
+      <p:sp>
+        <p:nvSpPr>
+          <p:cNvPr id="10" name="Text 5"/>
+          <p:cNvSpPr/>
+          <p:nvPr/>
+        </p:nvSpPr>
+        <p:spPr>
+          <a:xfrm>
+            <a:off x="10641925" y="3820597"/>
+            <a:ext cx="2835235" cy="354330"/>
+          </a:xfrm>
+          <a:prstGeom prst="rect">
+            <a:avLst/>
+          </a:prstGeom>
+          <a:noFill/>
+          <a:ln/>
+        </p:spPr>
+        <p:txBody>
+          <a:bodyPr wrap="none" lIns="0" tIns="0" rIns="0" bIns="0" rtlCol="0" anchor="t"/>
+          <a:lstStyle/>
+          <a:p>
+            <a:pPr marL="0" indent="0" algn="l">
+              <a:lnSpc>
+                <a:spcPts val="2750"/>
+              </a:lnSpc>
+              <a:buNone/>
+            </a:pPr>
+            <a:r>
+              <a:rPr lang="en-US" sz="2200" dirty="0">
+                <a:solidFill>
+                  <a:srgbClr val="2C2821"/>
+                </a:solidFill>
+                <a:latin typeface="Alice" pitchFamily="34" charset="0"/>
+                <a:ea typeface="Alice" pitchFamily="34" charset="-122"/>
+                <a:cs typeface="Alice" pitchFamily="34" charset="-120"/>
+              </a:rPr>
               <a:t>資料庫連線壓力</a:t>
             </a:r>
             <a:endParaRPr lang="en-US" sz="2200" dirty="0"/>
@@ -11978,7 +11801,7 @@
           <a:bodyPr wrap="square" lIns="0" tIns="0" rIns="0" bIns="0" rtlCol="0" anchor="t"/>
           <a:lstStyle/>
           <a:p>
-            <a:pPr algn="l" indent="0" marL="0">
+            <a:pPr marL="0" indent="0" algn="l">
               <a:lnSpc>
                 <a:spcPts val="2850"/>
               </a:lnSpc>
@@ -12300,4 +12123,299 @@
     </a:ext>
   </a:extLst>
 </a:theme>
+</file>
+
+<file path=ppt/theme/theme2.xml><?xml version="1.0" encoding="utf-8"?>
+<a:theme xmlns:a="http://schemas.openxmlformats.org/drawingml/2006/main" name="Office 佈景主題">
+  <a:themeElements>
+    <a:clrScheme name="Office">
+      <a:dk1>
+        <a:sysClr val="windowText" lastClr="000000"/>
+      </a:dk1>
+      <a:lt1>
+        <a:sysClr val="window" lastClr="FFFFFF"/>
+      </a:lt1>
+      <a:dk2>
+        <a:srgbClr val="44546A"/>
+      </a:dk2>
+      <a:lt2>
+        <a:srgbClr val="E7E6E6"/>
+      </a:lt2>
+      <a:accent1>
+        <a:srgbClr val="4472C4"/>
+      </a:accent1>
+      <a:accent2>
+        <a:srgbClr val="ED7D31"/>
+      </a:accent2>
+      <a:accent3>
+        <a:srgbClr val="A5A5A5"/>
+      </a:accent3>
+      <a:accent4>
+        <a:srgbClr val="FFC000"/>
+      </a:accent4>
+      <a:accent5>
+        <a:srgbClr val="5B9BD5"/>
+      </a:accent5>
+      <a:accent6>
+        <a:srgbClr val="70AD47"/>
+      </a:accent6>
+      <a:hlink>
+        <a:srgbClr val="0563C1"/>
+      </a:hlink>
+      <a:folHlink>
+        <a:srgbClr val="954F72"/>
+      </a:folHlink>
+    </a:clrScheme>
+    <a:fontScheme name="Office">
+      <a:majorFont>
+        <a:latin typeface="Calibri Light" panose="020F0302020204030204"/>
+        <a:ea typeface=""/>
+        <a:cs typeface=""/>
+        <a:font script="Jpan" typeface="游ゴシック Light"/>
+        <a:font script="Hang" typeface="맑은 고딕"/>
+        <a:font script="Hans" typeface="等线 Light"/>
+        <a:font script="Hant" typeface="新細明體"/>
+        <a:font script="Arab" typeface="Times New Roman"/>
+        <a:font script="Hebr" typeface="Times New Roman"/>
+        <a:font script="Thai" typeface="Angsana New"/>
+        <a:font script="Ethi" typeface="Nyala"/>
+        <a:font script="Beng" typeface="Vrinda"/>
+        <a:font script="Gujr" typeface="Shruti"/>
+        <a:font script="Khmr" typeface="MoolBoran"/>
+        <a:font script="Knda" typeface="Tunga"/>
+        <a:font script="Guru" typeface="Raavi"/>
+        <a:font script="Cans" typeface="Euphemia"/>
+        <a:font script="Cher" typeface="Plantagenet Cherokee"/>
+        <a:font script="Yiii" typeface="Microsoft Yi Baiti"/>
+        <a:font script="Tibt" typeface="Microsoft Himalaya"/>
+        <a:font script="Thaa" typeface="MV Boli"/>
+        <a:font script="Deva" typeface="Mangal"/>
+        <a:font script="Telu" typeface="Gautami"/>
+        <a:font script="Taml" typeface="Latha"/>
+        <a:font script="Syrc" typeface="Estrangelo Edessa"/>
+        <a:font script="Orya" typeface="Kalinga"/>
+        <a:font script="Mlym" typeface="Kartika"/>
+        <a:font script="Laoo" typeface="DokChampa"/>
+        <a:font script="Sinh" typeface="Iskoola Pota"/>
+        <a:font script="Mong" typeface="Mongolian Baiti"/>
+        <a:font script="Viet" typeface="Times New Roman"/>
+        <a:font script="Uigh" typeface="Microsoft Uighur"/>
+        <a:font script="Geor" typeface="Sylfaen"/>
+        <a:font script="Armn" typeface="Arial"/>
+        <a:font script="Bugi" typeface="Leelawadee UI"/>
+        <a:font script="Bopo" typeface="Microsoft JhengHei"/>
+        <a:font script="Java" typeface="Javanese Text"/>
+        <a:font script="Lisu" typeface="Segoe UI"/>
+        <a:font script="Mymr" typeface="Myanmar Text"/>
+        <a:font script="Nkoo" typeface="Ebrima"/>
+        <a:font script="Olck" typeface="Nirmala UI"/>
+        <a:font script="Osma" typeface="Ebrima"/>
+        <a:font script="Phag" typeface="Phagspa"/>
+        <a:font script="Syrn" typeface="Estrangelo Edessa"/>
+        <a:font script="Syrj" typeface="Estrangelo Edessa"/>
+        <a:font script="Syre" typeface="Estrangelo Edessa"/>
+        <a:font script="Sora" typeface="Nirmala UI"/>
+        <a:font script="Tale" typeface="Microsoft Tai Le"/>
+        <a:font script="Talu" typeface="Microsoft New Tai Lue"/>
+        <a:font script="Tfng" typeface="Ebrima"/>
+      </a:majorFont>
+      <a:minorFont>
+        <a:latin typeface="Calibri" panose="020F0502020204030204"/>
+        <a:ea typeface=""/>
+        <a:cs typeface=""/>
+        <a:font script="Jpan" typeface="游ゴシック"/>
+        <a:font script="Hang" typeface="맑은 고딕"/>
+        <a:font script="Hans" typeface="等线"/>
+        <a:font script="Hant" typeface="新細明體"/>
+        <a:font script="Arab" typeface="Arial"/>
+        <a:font script="Hebr" typeface="Arial"/>
+        <a:font script="Thai" typeface="Cordia New"/>
+        <a:font script="Ethi" typeface="Nyala"/>
+        <a:font script="Beng" typeface="Vrinda"/>
+        <a:font script="Gujr" typeface="Shruti"/>
+        <a:font script="Khmr" typeface="DaunPenh"/>
+        <a:font script="Knda" typeface="Tunga"/>
+        <a:font script="Guru" typeface="Raavi"/>
+        <a:font script="Cans" typeface="Euphemia"/>
+        <a:font script="Cher" typeface="Plantagenet Cherokee"/>
+        <a:font script="Yiii" typeface="Microsoft Yi Baiti"/>
+        <a:font script="Tibt" typeface="Microsoft Himalaya"/>
+        <a:font script="Thaa" typeface="MV Boli"/>
+        <a:font script="Deva" typeface="Mangal"/>
+        <a:font script="Telu" typeface="Gautami"/>
+        <a:font script="Taml" typeface="Latha"/>
+        <a:font script="Syrc" typeface="Estrangelo Edessa"/>
+        <a:font script="Orya" typeface="Kalinga"/>
+        <a:font script="Mlym" typeface="Kartika"/>
+        <a:font script="Laoo" typeface="DokChampa"/>
+        <a:font script="Sinh" typeface="Iskoola Pota"/>
+        <a:font script="Mong" typeface="Mongolian Baiti"/>
+        <a:font script="Viet" typeface="Arial"/>
+        <a:font script="Uigh" typeface="Microsoft Uighur"/>
+        <a:font script="Geor" typeface="Sylfaen"/>
+        <a:font script="Armn" typeface="Arial"/>
+        <a:font script="Bugi" typeface="Leelawadee UI"/>
+        <a:font script="Bopo" typeface="Microsoft JhengHei"/>
+        <a:font script="Java" typeface="Javanese Text"/>
+        <a:font script="Lisu" typeface="Segoe UI"/>
+        <a:font script="Mymr" typeface="Myanmar Text"/>
+        <a:font script="Nkoo" typeface="Ebrima"/>
+        <a:font script="Olck" typeface="Nirmala UI"/>
+        <a:font script="Osma" typeface="Ebrima"/>
+        <a:font script="Phag" typeface="Phagspa"/>
+        <a:font script="Syrn" typeface="Estrangelo Edessa"/>
+        <a:font script="Syrj" typeface="Estrangelo Edessa"/>
+        <a:font script="Syre" typeface="Estrangelo Edessa"/>
+        <a:font script="Sora" typeface="Nirmala UI"/>
+        <a:font script="Tale" typeface="Microsoft Tai Le"/>
+        <a:font script="Talu" typeface="Microsoft New Tai Lue"/>
+        <a:font script="Tfng" typeface="Ebrima"/>
+      </a:minorFont>
+    </a:fontScheme>
+    <a:fmtScheme name="Office">
+      <a:fillStyleLst>
+        <a:solidFill>
+          <a:schemeClr val="phClr"/>
+        </a:solidFill>
+        <a:gradFill rotWithShape="1">
+          <a:gsLst>
+            <a:gs pos="0">
+              <a:schemeClr val="phClr">
+                <a:lumMod val="110000"/>
+                <a:satMod val="105000"/>
+                <a:tint val="67000"/>
+              </a:schemeClr>
+            </a:gs>
+            <a:gs pos="50000">
+              <a:schemeClr val="phClr">
+                <a:lumMod val="105000"/>
+                <a:satMod val="103000"/>
+                <a:tint val="73000"/>
+              </a:schemeClr>
+            </a:gs>
+            <a:gs pos="100000">
+              <a:schemeClr val="phClr">
+                <a:lumMod val="105000"/>
+                <a:satMod val="109000"/>
+                <a:tint val="81000"/>
+              </a:schemeClr>
+            </a:gs>
+          </a:gsLst>
+          <a:lin ang="5400000" scaled="0"/>
+        </a:gradFill>
+        <a:gradFill rotWithShape="1">
+          <a:gsLst>
+            <a:gs pos="0">
+              <a:schemeClr val="phClr">
+                <a:satMod val="103000"/>
+                <a:lumMod val="102000"/>
+                <a:tint val="94000"/>
+              </a:schemeClr>
+            </a:gs>
+            <a:gs pos="50000">
+              <a:schemeClr val="phClr">
+                <a:satMod val="110000"/>
+                <a:lumMod val="100000"/>
+                <a:shade val="100000"/>
+              </a:schemeClr>
+            </a:gs>
+            <a:gs pos="100000">
+              <a:schemeClr val="phClr">
+                <a:lumMod val="99000"/>
+                <a:satMod val="120000"/>
+                <a:shade val="78000"/>
+              </a:schemeClr>
+            </a:gs>
+          </a:gsLst>
+          <a:lin ang="5400000" scaled="0"/>
+        </a:gradFill>
+      </a:fillStyleLst>
+      <a:lnStyleLst>
+        <a:ln w="6350" cap="flat" cmpd="sng" algn="ctr">
+          <a:solidFill>
+            <a:schemeClr val="phClr"/>
+          </a:solidFill>
+          <a:prstDash val="solid"/>
+          <a:miter lim="800000"/>
+        </a:ln>
+        <a:ln w="12700" cap="flat" cmpd="sng" algn="ctr">
+          <a:solidFill>
+            <a:schemeClr val="phClr"/>
+          </a:solidFill>
+          <a:prstDash val="solid"/>
+          <a:miter lim="800000"/>
+        </a:ln>
+        <a:ln w="19050" cap="flat" cmpd="sng" algn="ctr">
+          <a:solidFill>
+            <a:schemeClr val="phClr"/>
+          </a:solidFill>
+          <a:prstDash val="solid"/>
+          <a:miter lim="800000"/>
+        </a:ln>
+      </a:lnStyleLst>
+      <a:effectStyleLst>
+        <a:effectStyle>
+          <a:effectLst/>
+        </a:effectStyle>
+        <a:effectStyle>
+          <a:effectLst/>
+        </a:effectStyle>
+        <a:effectStyle>
+          <a:effectLst>
+            <a:outerShdw blurRad="57150" dist="19050" dir="5400000" algn="ctr" rotWithShape="0">
+              <a:srgbClr val="000000">
+                <a:alpha val="63000"/>
+              </a:srgbClr>
+            </a:outerShdw>
+          </a:effectLst>
+        </a:effectStyle>
+      </a:effectStyleLst>
+      <a:bgFillStyleLst>
+        <a:solidFill>
+          <a:schemeClr val="phClr"/>
+        </a:solidFill>
+        <a:solidFill>
+          <a:schemeClr val="phClr">
+            <a:tint val="95000"/>
+            <a:satMod val="170000"/>
+          </a:schemeClr>
+        </a:solidFill>
+        <a:gradFill rotWithShape="1">
+          <a:gsLst>
+            <a:gs pos="0">
+              <a:schemeClr val="phClr">
+                <a:tint val="93000"/>
+                <a:satMod val="150000"/>
+                <a:shade val="98000"/>
+                <a:lumMod val="102000"/>
+              </a:schemeClr>
+            </a:gs>
+            <a:gs pos="50000">
+              <a:schemeClr val="phClr">
+                <a:tint val="98000"/>
+                <a:satMod val="130000"/>
+                <a:shade val="90000"/>
+                <a:lumMod val="103000"/>
+              </a:schemeClr>
+            </a:gs>
+            <a:gs pos="100000">
+              <a:schemeClr val="phClr">
+                <a:shade val="63000"/>
+                <a:satMod val="120000"/>
+              </a:schemeClr>
+            </a:gs>
+          </a:gsLst>
+          <a:lin ang="5400000" scaled="0"/>
+        </a:gradFill>
+      </a:bgFillStyleLst>
+    </a:fmtScheme>
+  </a:themeElements>
+  <a:objectDefaults/>
+  <a:extraClrSchemeLst/>
+  <a:extLst>
+    <a:ext uri="{05A4C25C-085E-4340-85A3-A5531E510DB2}">
+      <thm15:themeFamily xmlns:thm15="http://schemas.microsoft.com/office/thememl/2012/main" name="Office Theme" id="{62F939B6-93AF-4DB8-9C6B-D6C7DFDC589F}" vid="{4A3C46E8-61CC-4603-A589-7422A47A8E4A}"/>
+    </a:ext>
+  </a:extLst>
+</a:theme>
 </file>